--- a/public/lessons/year-6-maths/summer/week-21/generate-terms-from-a-position-rule/teaching-powerpoint-v1.pptx
+++ b/public/lessons/year-6-maths/summer/week-21/generate-terms-from-a-position-rule/teaching-powerpoint-v1.pptx
@@ -2,24 +2,24 @@
 <file path=ppt/presentation.xml><?xml version="1.0" encoding="utf-8"?>
 <p:presentation xmlns:p="http://schemas.openxmlformats.org/presentationml/2006/main">
   <p:sldMasterIdLst>
-    <p:sldMasterId xmlns:r="http://schemas.openxmlformats.org/officeDocument/2006/relationships" id="2147483648" r:id="R17ef3a5be87b412b"/>
+    <p:sldMasterId xmlns:r="http://schemas.openxmlformats.org/officeDocument/2006/relationships" id="2147483648" r:id="Rb8209e0a3c6347f1"/>
   </p:sldMasterIdLst>
   <p:notesMasterIdLst>
-    <p:notesMasterId xmlns:r="http://schemas.openxmlformats.org/officeDocument/2006/relationships" r:id="R9b17ac82a8d341df"/>
+    <p:notesMasterId xmlns:r="http://schemas.openxmlformats.org/officeDocument/2006/relationships" r:id="R19b90a8603d94581"/>
   </p:notesMasterIdLst>
   <p:sldIdLst>
-    <p:sldId xmlns:r="http://schemas.openxmlformats.org/officeDocument/2006/relationships" id="256" r:id="R0149bdec082249e1"/>
-    <p:sldId xmlns:r="http://schemas.openxmlformats.org/officeDocument/2006/relationships" id="257" r:id="R62452e53769b402a"/>
-    <p:sldId xmlns:r="http://schemas.openxmlformats.org/officeDocument/2006/relationships" id="258" r:id="Rf62ec1c69a014e34"/>
-    <p:sldId xmlns:r="http://schemas.openxmlformats.org/officeDocument/2006/relationships" id="259" r:id="Rf9d6c05155564268"/>
-    <p:sldId xmlns:r="http://schemas.openxmlformats.org/officeDocument/2006/relationships" id="260" r:id="R49ee4be1858f4c28"/>
-    <p:sldId xmlns:r="http://schemas.openxmlformats.org/officeDocument/2006/relationships" id="261" r:id="R4040f153d8ee4ad3"/>
-    <p:sldId xmlns:r="http://schemas.openxmlformats.org/officeDocument/2006/relationships" id="262" r:id="R413565d801bb4cba"/>
-    <p:sldId xmlns:r="http://schemas.openxmlformats.org/officeDocument/2006/relationships" id="263" r:id="R7257ef6606c94ece"/>
-    <p:sldId xmlns:r="http://schemas.openxmlformats.org/officeDocument/2006/relationships" id="264" r:id="R6944a8b0290848db"/>
-    <p:sldId xmlns:r="http://schemas.openxmlformats.org/officeDocument/2006/relationships" id="265" r:id="Rf1640915265645e4"/>
-    <p:sldId xmlns:r="http://schemas.openxmlformats.org/officeDocument/2006/relationships" id="266" r:id="R1f0b8e966b734e45"/>
-    <p:sldId xmlns:r="http://schemas.openxmlformats.org/officeDocument/2006/relationships" id="267" r:id="Rd153838b30a14b7d"/>
+    <p:sldId xmlns:r="http://schemas.openxmlformats.org/officeDocument/2006/relationships" id="256" r:id="R59a546a87c2142aa"/>
+    <p:sldId xmlns:r="http://schemas.openxmlformats.org/officeDocument/2006/relationships" id="257" r:id="R779cfc7bc31e4f81"/>
+    <p:sldId xmlns:r="http://schemas.openxmlformats.org/officeDocument/2006/relationships" id="258" r:id="Re9a377ebf7a64162"/>
+    <p:sldId xmlns:r="http://schemas.openxmlformats.org/officeDocument/2006/relationships" id="259" r:id="Rbcb1a2b74edb4ba8"/>
+    <p:sldId xmlns:r="http://schemas.openxmlformats.org/officeDocument/2006/relationships" id="260" r:id="Rd2a175a1a45f42b8"/>
+    <p:sldId xmlns:r="http://schemas.openxmlformats.org/officeDocument/2006/relationships" id="261" r:id="Rc7a1c01432454cd2"/>
+    <p:sldId xmlns:r="http://schemas.openxmlformats.org/officeDocument/2006/relationships" id="262" r:id="Ra57e518760c54c0e"/>
+    <p:sldId xmlns:r="http://schemas.openxmlformats.org/officeDocument/2006/relationships" id="263" r:id="R90ade126ff654f6d"/>
+    <p:sldId xmlns:r="http://schemas.openxmlformats.org/officeDocument/2006/relationships" id="264" r:id="R4c2ccdb6f32a4b41"/>
+    <p:sldId xmlns:r="http://schemas.openxmlformats.org/officeDocument/2006/relationships" id="265" r:id="R9548fb3136764d78"/>
+    <p:sldId xmlns:r="http://schemas.openxmlformats.org/officeDocument/2006/relationships" id="266" r:id="R24addc860e774547"/>
+    <p:sldId xmlns:r="http://schemas.openxmlformats.org/officeDocument/2006/relationships" id="267" r:id="R57f5da6970c14651"/>
   </p:sldIdLst>
   <p:sldSz cx="12192000" cy="6858000"/>
   <p:notesSz cx="6858000" cy="9144000"/>
@@ -873,7 +873,7 @@
           <a:lstStyle xmlns:a="http://schemas.openxmlformats.org/drawingml/2006/main"/>
           <a:p xmlns:a="http://schemas.openxmlformats.org/drawingml/2006/main">
             <a:r>
-              <a:t>I do. Reveal the question, setup and each calculation stage one click at a time. Pupils watch before copying. Model answer: 3, 7, 11, 15, 19.</a:t>
+              <a:t>I do. Reveal the question, then reveal each mathematical change one click at a time. Point to the numbers and operation that changed before moving to the next line. Final answer: 3, 7, 11, 15, 19.</a:t>
             </a:r>
           </a:p>
         </p:txBody>
@@ -1291,7 +1291,7 @@
   </p:cSld>
   <p:clrMap bg1="lt1" tx1="dk1" bg2="lt2" tx2="dk2" accent1="accent1" accent2="accent2" accent3="accent3" accent4="accent4" accent5="accent5" accent6="accent6" hlink="hlink" folHlink="folHlink"/>
   <p:sldLayoutIdLst>
-    <p:sldLayoutId xmlns:r="http://schemas.openxmlformats.org/officeDocument/2006/relationships" id="2147483649" r:id="Rcd7dd8bc8b6542b6"/>
+    <p:sldLayoutId xmlns:r="http://schemas.openxmlformats.org/officeDocument/2006/relationships" id="2147483649" r:id="Rdecb0e199ca54bb5"/>
   </p:sldLayoutIdLst>
   <p:txStyles>
     <p:titleStyle>
@@ -1842,7 +1842,7 @@
           <p:cNvPr id="12" name="">
             <a:extLst xmlns:a="http://schemas.openxmlformats.org/drawingml/2006/main">
               <a:ext uri="{FF2B5EF4-FFF2-40B4-BE49-F238E27FC236}">
-                <a16:creationId xmlns:a16="http://schemas.microsoft.com/office/drawing/2014/main" id="{BBE2B8A5-ABFE-40D8-8B9D-95B215139AF9}"/>
+                <a16:creationId xmlns:a16="http://schemas.microsoft.com/office/drawing/2014/main" id="{C54CFAB5-ADF8-4AAA-BE7B-E2BBCA277FCD}"/>
               </a:ext>
             </a:extLst>
           </p:cNvPr>
@@ -1874,7 +1874,7 @@
           <p:cNvPr id="2" name="">
             <a:extLst xmlns:a="http://schemas.openxmlformats.org/drawingml/2006/main">
               <a:ext uri="{FF2B5EF4-FFF2-40B4-BE49-F238E27FC236}">
-                <a16:creationId xmlns:a16="http://schemas.microsoft.com/office/drawing/2014/main" id="{44DFF56D-36F4-459A-A0F3-6B9EA97EB140}"/>
+                <a16:creationId xmlns:a16="http://schemas.microsoft.com/office/drawing/2014/main" id="{7237EF0E-D8B2-406B-99CD-D6ED73342E70}"/>
               </a:ext>
             </a:extLst>
           </p:cNvPr>
@@ -1931,7 +1931,7 @@
           <p:cNvPr id="3" name="">
             <a:extLst xmlns:a="http://schemas.openxmlformats.org/drawingml/2006/main">
               <a:ext uri="{FF2B5EF4-FFF2-40B4-BE49-F238E27FC236}">
-                <a16:creationId xmlns:a16="http://schemas.microsoft.com/office/drawing/2014/main" id="{38EE8F62-E433-4E06-9F1D-17D5B6C3936B}"/>
+                <a16:creationId xmlns:a16="http://schemas.microsoft.com/office/drawing/2014/main" id="{EC3C4203-6924-4DAA-BE12-B6D61EDA64D3}"/>
               </a:ext>
             </a:extLst>
           </p:cNvPr>
@@ -1965,7 +1965,7 @@
           <p:cNvPr id="4" name="">
             <a:extLst xmlns:a="http://schemas.openxmlformats.org/drawingml/2006/main">
               <a:ext uri="{FF2B5EF4-FFF2-40B4-BE49-F238E27FC236}">
-                <a16:creationId xmlns:a16="http://schemas.microsoft.com/office/drawing/2014/main" id="{A41011C7-2B98-4F94-89C6-DDA62C4F2282}"/>
+                <a16:creationId xmlns:a16="http://schemas.microsoft.com/office/drawing/2014/main" id="{E867DCD4-FF06-4B9F-9503-3FCD2B34ED8E}"/>
               </a:ext>
             </a:extLst>
           </p:cNvPr>
@@ -2022,7 +2022,7 @@
           <p:cNvPr id="5" name="">
             <a:extLst xmlns:a="http://schemas.openxmlformats.org/drawingml/2006/main">
               <a:ext uri="{FF2B5EF4-FFF2-40B4-BE49-F238E27FC236}">
-                <a16:creationId xmlns:a16="http://schemas.microsoft.com/office/drawing/2014/main" id="{E0647FDD-E4BE-4D59-B5D3-A567A918B297}"/>
+                <a16:creationId xmlns:a16="http://schemas.microsoft.com/office/drawing/2014/main" id="{CCA2BD99-96AC-458B-BBC6-2DC8BD0963CD}"/>
               </a:ext>
             </a:extLst>
           </p:cNvPr>
@@ -2079,7 +2079,7 @@
           <p:cNvPr id="6" name="">
             <a:extLst xmlns:a="http://schemas.openxmlformats.org/drawingml/2006/main">
               <a:ext uri="{FF2B5EF4-FFF2-40B4-BE49-F238E27FC236}">
-                <a16:creationId xmlns:a16="http://schemas.microsoft.com/office/drawing/2014/main" id="{CB2F492E-6F2D-41D3-B8A7-FD204A9A3CD2}"/>
+                <a16:creationId xmlns:a16="http://schemas.microsoft.com/office/drawing/2014/main" id="{265D4330-2ED6-4AEB-9198-EA79B04E75BD}"/>
               </a:ext>
             </a:extLst>
           </p:cNvPr>
@@ -2113,7 +2113,7 @@
           <p:cNvPr id="7" name="">
             <a:extLst xmlns:a="http://schemas.openxmlformats.org/drawingml/2006/main">
               <a:ext uri="{FF2B5EF4-FFF2-40B4-BE49-F238E27FC236}">
-                <a16:creationId xmlns:a16="http://schemas.microsoft.com/office/drawing/2014/main" id="{2D3C31C3-FEED-44BD-AF19-092748EF3DFB}"/>
+                <a16:creationId xmlns:a16="http://schemas.microsoft.com/office/drawing/2014/main" id="{B2257A6B-E1BF-417C-8515-5E88F1CFBE44}"/>
               </a:ext>
             </a:extLst>
           </p:cNvPr>
@@ -2170,7 +2170,7 @@
           <p:cNvPr id="8" name="">
             <a:extLst xmlns:a="http://schemas.openxmlformats.org/drawingml/2006/main">
               <a:ext uri="{FF2B5EF4-FFF2-40B4-BE49-F238E27FC236}">
-                <a16:creationId xmlns:a16="http://schemas.microsoft.com/office/drawing/2014/main" id="{0ADAFA6A-A0A6-4B68-916A-5AAFADF286B1}"/>
+                <a16:creationId xmlns:a16="http://schemas.microsoft.com/office/drawing/2014/main" id="{00AE152B-1F61-4977-B9E0-2F8C2A22BB99}"/>
               </a:ext>
             </a:extLst>
           </p:cNvPr>
@@ -2227,7 +2227,7 @@
           <p:cNvPr id="9" name="">
             <a:extLst xmlns:a="http://schemas.openxmlformats.org/drawingml/2006/main">
               <a:ext uri="{FF2B5EF4-FFF2-40B4-BE49-F238E27FC236}">
-                <a16:creationId xmlns:a16="http://schemas.microsoft.com/office/drawing/2014/main" id="{13E7B535-6626-4639-855E-3D964C539C57}"/>
+                <a16:creationId xmlns:a16="http://schemas.microsoft.com/office/drawing/2014/main" id="{90A4A902-6585-4AC1-B911-6B2F2786092D}"/>
               </a:ext>
             </a:extLst>
           </p:cNvPr>
@@ -2284,7 +2284,7 @@
           <p:cNvPr id="10" name="">
             <a:extLst xmlns:a="http://schemas.openxmlformats.org/drawingml/2006/main">
               <a:ext uri="{FF2B5EF4-FFF2-40B4-BE49-F238E27FC236}">
-                <a16:creationId xmlns:a16="http://schemas.microsoft.com/office/drawing/2014/main" id="{BAF11670-CCC6-4B85-90A9-7A78A6F702AE}"/>
+                <a16:creationId xmlns:a16="http://schemas.microsoft.com/office/drawing/2014/main" id="{078F60C8-7841-4E36-914A-0A6D7F51028E}"/>
               </a:ext>
             </a:extLst>
           </p:cNvPr>
@@ -2341,7 +2341,7 @@
           <p:cNvPr id="11" name="">
             <a:extLst xmlns:a="http://schemas.openxmlformats.org/drawingml/2006/main">
               <a:ext uri="{FF2B5EF4-FFF2-40B4-BE49-F238E27FC236}">
-                <a16:creationId xmlns:a16="http://schemas.microsoft.com/office/drawing/2014/main" id="{A2BF2D80-3B9F-4B3D-8A2A-A150AB36AD0C}"/>
+                <a16:creationId xmlns:a16="http://schemas.microsoft.com/office/drawing/2014/main" id="{4644C074-AF35-4625-AF19-35A653E0AA6D}"/>
               </a:ext>
             </a:extLst>
           </p:cNvPr>
@@ -2396,7 +2396,7 @@
     </p:spTree>
     <p:extLst>
       <p:ext uri="{BB962C8B-B14F-4D97-AF65-F5344CB8AC3E}">
-        <p14:creationId xmlns:p14="http://schemas.microsoft.com/office/powerpoint/2010/main" val="1516687935"/>
+        <p14:creationId xmlns:p14="http://schemas.microsoft.com/office/powerpoint/2010/main" val="399295202"/>
       </p:ext>
     </p:extLst>
   </p:cSld>
@@ -2427,7 +2427,7 @@
           <p:cNvPr id="14" name="">
             <a:extLst xmlns:a="http://schemas.openxmlformats.org/drawingml/2006/main">
               <a:ext uri="{FF2B5EF4-FFF2-40B4-BE49-F238E27FC236}">
-                <a16:creationId xmlns:a16="http://schemas.microsoft.com/office/drawing/2014/main" id="{19BF29CB-73C7-4B13-8013-863592A5FD89}"/>
+                <a16:creationId xmlns:a16="http://schemas.microsoft.com/office/drawing/2014/main" id="{3980C779-BD57-4A9A-993D-9C7E43D50C2F}"/>
               </a:ext>
             </a:extLst>
           </p:cNvPr>
@@ -2459,7 +2459,7 @@
           <p:cNvPr id="2" name="">
             <a:extLst xmlns:a="http://schemas.openxmlformats.org/drawingml/2006/main">
               <a:ext uri="{FF2B5EF4-FFF2-40B4-BE49-F238E27FC236}">
-                <a16:creationId xmlns:a16="http://schemas.microsoft.com/office/drawing/2014/main" id="{80DCA354-DCB9-453F-BF7E-B84EB127E3AC}"/>
+                <a16:creationId xmlns:a16="http://schemas.microsoft.com/office/drawing/2014/main" id="{2F6B0B55-7CB0-4C33-90A2-1DF45177DE61}"/>
               </a:ext>
             </a:extLst>
           </p:cNvPr>
@@ -2516,7 +2516,7 @@
           <p:cNvPr id="3" name="">
             <a:extLst xmlns:a="http://schemas.openxmlformats.org/drawingml/2006/main">
               <a:ext uri="{FF2B5EF4-FFF2-40B4-BE49-F238E27FC236}">
-                <a16:creationId xmlns:a16="http://schemas.microsoft.com/office/drawing/2014/main" id="{6C3F448A-0673-4283-9FFF-828218280904}"/>
+                <a16:creationId xmlns:a16="http://schemas.microsoft.com/office/drawing/2014/main" id="{B26FD240-9159-4429-B42F-B4BC9647D8C1}"/>
               </a:ext>
             </a:extLst>
           </p:cNvPr>
@@ -2548,7 +2548,7 @@
           <p:cNvPr id="4" name="">
             <a:extLst xmlns:a="http://schemas.openxmlformats.org/drawingml/2006/main">
               <a:ext uri="{FF2B5EF4-FFF2-40B4-BE49-F238E27FC236}">
-                <a16:creationId xmlns:a16="http://schemas.microsoft.com/office/drawing/2014/main" id="{1EFE7898-670D-4350-8A17-5AF8EF0A9413}"/>
+                <a16:creationId xmlns:a16="http://schemas.microsoft.com/office/drawing/2014/main" id="{67B59A13-098E-4DA4-9EC8-3666AF769F9F}"/>
               </a:ext>
             </a:extLst>
           </p:cNvPr>
@@ -2605,7 +2605,7 @@
           <p:cNvPr id="5" name="">
             <a:extLst xmlns:a="http://schemas.openxmlformats.org/drawingml/2006/main">
               <a:ext uri="{FF2B5EF4-FFF2-40B4-BE49-F238E27FC236}">
-                <a16:creationId xmlns:a16="http://schemas.microsoft.com/office/drawing/2014/main" id="{33E968C3-68E5-4524-ADBC-31C78A037A2D}"/>
+                <a16:creationId xmlns:a16="http://schemas.microsoft.com/office/drawing/2014/main" id="{A763A524-D7B0-4ACD-BA3B-05B4E9536B6A}"/>
               </a:ext>
             </a:extLst>
           </p:cNvPr>
@@ -2662,7 +2662,7 @@
           <p:cNvPr id="6" name="">
             <a:extLst xmlns:a="http://schemas.openxmlformats.org/drawingml/2006/main">
               <a:ext uri="{FF2B5EF4-FFF2-40B4-BE49-F238E27FC236}">
-                <a16:creationId xmlns:a16="http://schemas.microsoft.com/office/drawing/2014/main" id="{FF2712F8-1511-485B-9DC9-CD381A0967E4}"/>
+                <a16:creationId xmlns:a16="http://schemas.microsoft.com/office/drawing/2014/main" id="{CB014284-7DC7-403D-8FFC-98A8AD39B858}"/>
               </a:ext>
             </a:extLst>
           </p:cNvPr>
@@ -2719,7 +2719,7 @@
           <p:cNvPr id="7" name="">
             <a:extLst xmlns:a="http://schemas.openxmlformats.org/drawingml/2006/main">
               <a:ext uri="{FF2B5EF4-FFF2-40B4-BE49-F238E27FC236}">
-                <a16:creationId xmlns:a16="http://schemas.microsoft.com/office/drawing/2014/main" id="{675E4DEF-634D-4E1A-B0A8-C3806BA3732D}"/>
+                <a16:creationId xmlns:a16="http://schemas.microsoft.com/office/drawing/2014/main" id="{4181D9FA-0393-42AD-9313-3670C3A909C8}"/>
               </a:ext>
             </a:extLst>
           </p:cNvPr>
@@ -2751,7 +2751,7 @@
           <p:cNvPr id="8" name="">
             <a:extLst xmlns:a="http://schemas.openxmlformats.org/drawingml/2006/main">
               <a:ext uri="{FF2B5EF4-FFF2-40B4-BE49-F238E27FC236}">
-                <a16:creationId xmlns:a16="http://schemas.microsoft.com/office/drawing/2014/main" id="{41E493FE-614A-46A2-9045-B7E3A93799F9}"/>
+                <a16:creationId xmlns:a16="http://schemas.microsoft.com/office/drawing/2014/main" id="{E7471DA8-D89C-4A64-B6D1-1E2BFA30517C}"/>
               </a:ext>
             </a:extLst>
           </p:cNvPr>
@@ -2808,7 +2808,7 @@
           <p:cNvPr id="9" name="">
             <a:extLst xmlns:a="http://schemas.openxmlformats.org/drawingml/2006/main">
               <a:ext uri="{FF2B5EF4-FFF2-40B4-BE49-F238E27FC236}">
-                <a16:creationId xmlns:a16="http://schemas.microsoft.com/office/drawing/2014/main" id="{28F8B1C3-2EFD-40E0-8E97-36193AC01415}"/>
+                <a16:creationId xmlns:a16="http://schemas.microsoft.com/office/drawing/2014/main" id="{D199C43A-9BD7-4F69-A2DC-19D1C1A2330A}"/>
               </a:ext>
             </a:extLst>
           </p:cNvPr>
@@ -2865,7 +2865,7 @@
           <p:cNvPr id="10" name="">
             <a:extLst xmlns:a="http://schemas.openxmlformats.org/drawingml/2006/main">
               <a:ext uri="{FF2B5EF4-FFF2-40B4-BE49-F238E27FC236}">
-                <a16:creationId xmlns:a16="http://schemas.microsoft.com/office/drawing/2014/main" id="{F32220FF-82C3-4B49-8552-E0A356336216}"/>
+                <a16:creationId xmlns:a16="http://schemas.microsoft.com/office/drawing/2014/main" id="{560E1543-0648-4B57-B478-7403FAD40E00}"/>
               </a:ext>
             </a:extLst>
           </p:cNvPr>
@@ -2922,7 +2922,7 @@
           <p:cNvPr id="11" name="">
             <a:extLst xmlns:a="http://schemas.openxmlformats.org/drawingml/2006/main">
               <a:ext uri="{FF2B5EF4-FFF2-40B4-BE49-F238E27FC236}">
-                <a16:creationId xmlns:a16="http://schemas.microsoft.com/office/drawing/2014/main" id="{5C28D9CE-C461-475F-AD40-4977A9F758C6}"/>
+                <a16:creationId xmlns:a16="http://schemas.microsoft.com/office/drawing/2014/main" id="{B6C1B763-CA70-478C-8193-C9994A1B9F6E}"/>
               </a:ext>
             </a:extLst>
           </p:cNvPr>
@@ -2979,7 +2979,7 @@
           <p:cNvPr id="12" name="">
             <a:extLst xmlns:a="http://schemas.openxmlformats.org/drawingml/2006/main">
               <a:ext uri="{FF2B5EF4-FFF2-40B4-BE49-F238E27FC236}">
-                <a16:creationId xmlns:a16="http://schemas.microsoft.com/office/drawing/2014/main" id="{A1F81FA5-8980-4723-90AF-FF22436B46E8}"/>
+                <a16:creationId xmlns:a16="http://schemas.microsoft.com/office/drawing/2014/main" id="{554A148E-B0C9-4344-8D9D-382ECE460D17}"/>
               </a:ext>
             </a:extLst>
           </p:cNvPr>
@@ -3036,7 +3036,7 @@
           <p:cNvPr id="13" name="">
             <a:extLst xmlns:a="http://schemas.openxmlformats.org/drawingml/2006/main">
               <a:ext uri="{FF2B5EF4-FFF2-40B4-BE49-F238E27FC236}">
-                <a16:creationId xmlns:a16="http://schemas.microsoft.com/office/drawing/2014/main" id="{7FDB7726-3ACA-4B26-93CA-2F6463C376B1}"/>
+                <a16:creationId xmlns:a16="http://schemas.microsoft.com/office/drawing/2014/main" id="{60C772C0-201E-4AA8-8E82-E75932619129}"/>
               </a:ext>
             </a:extLst>
           </p:cNvPr>
@@ -3091,7 +3091,7 @@
     </p:spTree>
     <p:extLst>
       <p:ext uri="{BB962C8B-B14F-4D97-AF65-F5344CB8AC3E}">
-        <p14:creationId xmlns:p14="http://schemas.microsoft.com/office/powerpoint/2010/main" val="2131241298"/>
+        <p14:creationId xmlns:p14="http://schemas.microsoft.com/office/powerpoint/2010/main" val="355700082"/>
       </p:ext>
     </p:extLst>
   </p:cSld>
@@ -3292,7 +3292,7 @@
           <p:cNvPr id="19" name="">
             <a:extLst xmlns:a="http://schemas.openxmlformats.org/drawingml/2006/main">
               <a:ext uri="{FF2B5EF4-FFF2-40B4-BE49-F238E27FC236}">
-                <a16:creationId xmlns:a16="http://schemas.microsoft.com/office/drawing/2014/main" id="{4D6110EF-292B-45ED-8CE5-2A1473E6C012}"/>
+                <a16:creationId xmlns:a16="http://schemas.microsoft.com/office/drawing/2014/main" id="{7891010B-1707-41D8-87C5-9E99715C75CF}"/>
               </a:ext>
             </a:extLst>
           </p:cNvPr>
@@ -3324,7 +3324,7 @@
           <p:cNvPr id="2" name="">
             <a:extLst xmlns:a="http://schemas.openxmlformats.org/drawingml/2006/main">
               <a:ext uri="{FF2B5EF4-FFF2-40B4-BE49-F238E27FC236}">
-                <a16:creationId xmlns:a16="http://schemas.microsoft.com/office/drawing/2014/main" id="{7A474BCF-FDA8-4C99-AD7A-2994017B9CEB}"/>
+                <a16:creationId xmlns:a16="http://schemas.microsoft.com/office/drawing/2014/main" id="{601A1430-3152-4D3D-A6ED-3CC90ABDF381}"/>
               </a:ext>
             </a:extLst>
           </p:cNvPr>
@@ -3381,7 +3381,7 @@
           <p:cNvPr id="3" name="">
             <a:extLst xmlns:a="http://schemas.openxmlformats.org/drawingml/2006/main">
               <a:ext uri="{FF2B5EF4-FFF2-40B4-BE49-F238E27FC236}">
-                <a16:creationId xmlns:a16="http://schemas.microsoft.com/office/drawing/2014/main" id="{55CA0E51-A487-402D-96F1-7297140BF295}"/>
+                <a16:creationId xmlns:a16="http://schemas.microsoft.com/office/drawing/2014/main" id="{D4E221F8-CA4F-45E8-8AAB-4769B9088331}"/>
               </a:ext>
             </a:extLst>
           </p:cNvPr>
@@ -3413,7 +3413,7 @@
           <p:cNvPr id="4" name="">
             <a:extLst xmlns:a="http://schemas.openxmlformats.org/drawingml/2006/main">
               <a:ext uri="{FF2B5EF4-FFF2-40B4-BE49-F238E27FC236}">
-                <a16:creationId xmlns:a16="http://schemas.microsoft.com/office/drawing/2014/main" id="{3C94861F-97EB-4BB7-B33E-D48F446E1C2C}"/>
+                <a16:creationId xmlns:a16="http://schemas.microsoft.com/office/drawing/2014/main" id="{646FDE71-EA7E-4000-98A4-7CA1FC376923}"/>
               </a:ext>
             </a:extLst>
           </p:cNvPr>
@@ -3470,7 +3470,7 @@
           <p:cNvPr id="5" name="">
             <a:extLst xmlns:a="http://schemas.openxmlformats.org/drawingml/2006/main">
               <a:ext uri="{FF2B5EF4-FFF2-40B4-BE49-F238E27FC236}">
-                <a16:creationId xmlns:a16="http://schemas.microsoft.com/office/drawing/2014/main" id="{7B938F10-1C1A-42B0-9A4F-887A9060D6CD}"/>
+                <a16:creationId xmlns:a16="http://schemas.microsoft.com/office/drawing/2014/main" id="{657ECDF4-F778-4E88-8A10-4EA34620AE32}"/>
               </a:ext>
             </a:extLst>
           </p:cNvPr>
@@ -3527,7 +3527,7 @@
           <p:cNvPr id="6" name="">
             <a:extLst xmlns:a="http://schemas.openxmlformats.org/drawingml/2006/main">
               <a:ext uri="{FF2B5EF4-FFF2-40B4-BE49-F238E27FC236}">
-                <a16:creationId xmlns:a16="http://schemas.microsoft.com/office/drawing/2014/main" id="{E973E81B-8FF0-4D6A-A3DD-5EAB06C6CC50}"/>
+                <a16:creationId xmlns:a16="http://schemas.microsoft.com/office/drawing/2014/main" id="{9CC15167-C8D8-4145-A3FF-9C755185DA87}"/>
               </a:ext>
             </a:extLst>
           </p:cNvPr>
@@ -3584,7 +3584,7 @@
           <p:cNvPr id="7" name="">
             <a:extLst xmlns:a="http://schemas.openxmlformats.org/drawingml/2006/main">
               <a:ext uri="{FF2B5EF4-FFF2-40B4-BE49-F238E27FC236}">
-                <a16:creationId xmlns:a16="http://schemas.microsoft.com/office/drawing/2014/main" id="{3C9E7E9D-6A86-48BC-80BA-90979130B7D9}"/>
+                <a16:creationId xmlns:a16="http://schemas.microsoft.com/office/drawing/2014/main" id="{F3E7E268-DFC8-4ABF-BBB0-3A5A826E4787}"/>
               </a:ext>
             </a:extLst>
           </p:cNvPr>
@@ -3616,7 +3616,7 @@
           <p:cNvPr id="8" name="">
             <a:extLst xmlns:a="http://schemas.openxmlformats.org/drawingml/2006/main">
               <a:ext uri="{FF2B5EF4-FFF2-40B4-BE49-F238E27FC236}">
-                <a16:creationId xmlns:a16="http://schemas.microsoft.com/office/drawing/2014/main" id="{69BA6470-174D-409A-970F-C822E43CE174}"/>
+                <a16:creationId xmlns:a16="http://schemas.microsoft.com/office/drawing/2014/main" id="{19427EBF-DA77-4AFC-81E8-969B3C21A3A6}"/>
               </a:ext>
             </a:extLst>
           </p:cNvPr>
@@ -3673,7 +3673,7 @@
           <p:cNvPr id="9" name="">
             <a:extLst xmlns:a="http://schemas.openxmlformats.org/drawingml/2006/main">
               <a:ext uri="{FF2B5EF4-FFF2-40B4-BE49-F238E27FC236}">
-                <a16:creationId xmlns:a16="http://schemas.microsoft.com/office/drawing/2014/main" id="{CF6FD3D0-E877-4CF6-88E4-94F4FED5E0DE}"/>
+                <a16:creationId xmlns:a16="http://schemas.microsoft.com/office/drawing/2014/main" id="{34B4B501-EDC5-4CE4-977C-018F66306E61}"/>
               </a:ext>
             </a:extLst>
           </p:cNvPr>
@@ -3730,7 +3730,7 @@
           <p:cNvPr id="10" name="">
             <a:extLst xmlns:a="http://schemas.openxmlformats.org/drawingml/2006/main">
               <a:ext uri="{FF2B5EF4-FFF2-40B4-BE49-F238E27FC236}">
-                <a16:creationId xmlns:a16="http://schemas.microsoft.com/office/drawing/2014/main" id="{AA8F16AE-7C73-411A-9E5D-AD41F0FBDDCB}"/>
+                <a16:creationId xmlns:a16="http://schemas.microsoft.com/office/drawing/2014/main" id="{34E6E06E-430F-4F5E-A99F-8CAA82F7D9FD}"/>
               </a:ext>
             </a:extLst>
           </p:cNvPr>
@@ -3787,7 +3787,7 @@
           <p:cNvPr id="11" name="">
             <a:extLst xmlns:a="http://schemas.openxmlformats.org/drawingml/2006/main">
               <a:ext uri="{FF2B5EF4-FFF2-40B4-BE49-F238E27FC236}">
-                <a16:creationId xmlns:a16="http://schemas.microsoft.com/office/drawing/2014/main" id="{F3B87878-90CB-4C7D-8BE8-CFE5AC98A078}"/>
+                <a16:creationId xmlns:a16="http://schemas.microsoft.com/office/drawing/2014/main" id="{D6BC6622-FBE6-4797-83F1-5D0F250092F4}"/>
               </a:ext>
             </a:extLst>
           </p:cNvPr>
@@ -3821,7 +3821,7 @@
           <p:cNvPr id="12" name="">
             <a:extLst xmlns:a="http://schemas.openxmlformats.org/drawingml/2006/main">
               <a:ext uri="{FF2B5EF4-FFF2-40B4-BE49-F238E27FC236}">
-                <a16:creationId xmlns:a16="http://schemas.microsoft.com/office/drawing/2014/main" id="{7B125ECC-1857-4F25-B79F-61E16C7F15B8}"/>
+                <a16:creationId xmlns:a16="http://schemas.microsoft.com/office/drawing/2014/main" id="{CDB3FF30-E9D3-4E0A-B6E2-D74765D12D3F}"/>
               </a:ext>
             </a:extLst>
           </p:cNvPr>
@@ -3878,7 +3878,7 @@
           <p:cNvPr id="13" name="">
             <a:extLst xmlns:a="http://schemas.openxmlformats.org/drawingml/2006/main">
               <a:ext uri="{FF2B5EF4-FFF2-40B4-BE49-F238E27FC236}">
-                <a16:creationId xmlns:a16="http://schemas.microsoft.com/office/drawing/2014/main" id="{F32A8CA6-3DB0-4F73-BB45-ADFB9A2AB627}"/>
+                <a16:creationId xmlns:a16="http://schemas.microsoft.com/office/drawing/2014/main" id="{4F3F3E93-0E88-41FD-A7D0-492D3B81F36E}"/>
               </a:ext>
             </a:extLst>
           </p:cNvPr>
@@ -3935,7 +3935,7 @@
           <p:cNvPr id="14" name="">
             <a:extLst xmlns:a="http://schemas.openxmlformats.org/drawingml/2006/main">
               <a:ext uri="{FF2B5EF4-FFF2-40B4-BE49-F238E27FC236}">
-                <a16:creationId xmlns:a16="http://schemas.microsoft.com/office/drawing/2014/main" id="{EF63FFCD-E519-4386-B6EA-1E3C8DC630B3}"/>
+                <a16:creationId xmlns:a16="http://schemas.microsoft.com/office/drawing/2014/main" id="{408917A2-B38D-407F-B32F-BF7C9E076B10}"/>
               </a:ext>
             </a:extLst>
           </p:cNvPr>
@@ -3992,7 +3992,7 @@
           <p:cNvPr id="15" name="">
             <a:extLst xmlns:a="http://schemas.openxmlformats.org/drawingml/2006/main">
               <a:ext uri="{FF2B5EF4-FFF2-40B4-BE49-F238E27FC236}">
-                <a16:creationId xmlns:a16="http://schemas.microsoft.com/office/drawing/2014/main" id="{EA43638D-5DD3-48A1-BD39-7937EC19B931}"/>
+                <a16:creationId xmlns:a16="http://schemas.microsoft.com/office/drawing/2014/main" id="{DF4D2C28-E35E-4BF1-8EB8-636EC534C9E5}"/>
               </a:ext>
             </a:extLst>
           </p:cNvPr>
@@ -4026,7 +4026,7 @@
           <p:cNvPr id="16" name="">
             <a:extLst xmlns:a="http://schemas.openxmlformats.org/drawingml/2006/main">
               <a:ext uri="{FF2B5EF4-FFF2-40B4-BE49-F238E27FC236}">
-                <a16:creationId xmlns:a16="http://schemas.microsoft.com/office/drawing/2014/main" id="{31ECFAA9-0D03-485D-A85A-B1F2F3034462}"/>
+                <a16:creationId xmlns:a16="http://schemas.microsoft.com/office/drawing/2014/main" id="{CEEB3085-5C53-4941-AACD-0C6903A8C525}"/>
               </a:ext>
             </a:extLst>
           </p:cNvPr>
@@ -4083,7 +4083,7 @@
           <p:cNvPr id="17" name="">
             <a:extLst xmlns:a="http://schemas.openxmlformats.org/drawingml/2006/main">
               <a:ext uri="{FF2B5EF4-FFF2-40B4-BE49-F238E27FC236}">
-                <a16:creationId xmlns:a16="http://schemas.microsoft.com/office/drawing/2014/main" id="{1DD2CCC5-D151-42E9-82C2-F34027151459}"/>
+                <a16:creationId xmlns:a16="http://schemas.microsoft.com/office/drawing/2014/main" id="{7687FC5D-91EF-4F42-8E8B-F22C394B399A}"/>
               </a:ext>
             </a:extLst>
           </p:cNvPr>
@@ -4140,7 +4140,7 @@
           <p:cNvPr id="18" name="">
             <a:extLst xmlns:a="http://schemas.openxmlformats.org/drawingml/2006/main">
               <a:ext uri="{FF2B5EF4-FFF2-40B4-BE49-F238E27FC236}">
-                <a16:creationId xmlns:a16="http://schemas.microsoft.com/office/drawing/2014/main" id="{D58DE288-EBF9-4D29-B58F-A2B2E366C99C}"/>
+                <a16:creationId xmlns:a16="http://schemas.microsoft.com/office/drawing/2014/main" id="{3B6B2CDC-20EB-4022-BDEF-F555D6A40823}"/>
               </a:ext>
             </a:extLst>
           </p:cNvPr>
@@ -4195,7 +4195,7 @@
     </p:spTree>
     <p:extLst>
       <p:ext uri="{BB962C8B-B14F-4D97-AF65-F5344CB8AC3E}">
-        <p14:creationId xmlns:p14="http://schemas.microsoft.com/office/powerpoint/2010/main" val="1364192408"/>
+        <p14:creationId xmlns:p14="http://schemas.microsoft.com/office/powerpoint/2010/main" val="1306176084"/>
       </p:ext>
     </p:extLst>
   </p:cSld>
@@ -4350,7 +4350,7 @@
           <p:cNvPr id="23" name="">
             <a:extLst xmlns:a="http://schemas.openxmlformats.org/drawingml/2006/main">
               <a:ext uri="{FF2B5EF4-FFF2-40B4-BE49-F238E27FC236}">
-                <a16:creationId xmlns:a16="http://schemas.microsoft.com/office/drawing/2014/main" id="{08E0D256-4B95-4F2A-8633-BA1E9243EE7E}"/>
+                <a16:creationId xmlns:a16="http://schemas.microsoft.com/office/drawing/2014/main" id="{595A0066-65D4-4581-94F3-7ACA4F637539}"/>
               </a:ext>
             </a:extLst>
           </p:cNvPr>
@@ -4382,7 +4382,7 @@
           <p:cNvPr id="2" name="">
             <a:extLst xmlns:a="http://schemas.openxmlformats.org/drawingml/2006/main">
               <a:ext uri="{FF2B5EF4-FFF2-40B4-BE49-F238E27FC236}">
-                <a16:creationId xmlns:a16="http://schemas.microsoft.com/office/drawing/2014/main" id="{6014837C-201C-428E-B01D-5C7FA938054B}"/>
+                <a16:creationId xmlns:a16="http://schemas.microsoft.com/office/drawing/2014/main" id="{2FA3B266-59A0-4C98-A0C0-C9831DFADE1F}"/>
               </a:ext>
             </a:extLst>
           </p:cNvPr>
@@ -4439,7 +4439,7 @@
           <p:cNvPr id="3" name="">
             <a:extLst xmlns:a="http://schemas.openxmlformats.org/drawingml/2006/main">
               <a:ext uri="{FF2B5EF4-FFF2-40B4-BE49-F238E27FC236}">
-                <a16:creationId xmlns:a16="http://schemas.microsoft.com/office/drawing/2014/main" id="{C449E6C4-580E-4856-B4D2-664194BEBB53}"/>
+                <a16:creationId xmlns:a16="http://schemas.microsoft.com/office/drawing/2014/main" id="{F1D5787A-3815-471E-B598-B78328B961EB}"/>
               </a:ext>
             </a:extLst>
           </p:cNvPr>
@@ -4471,7 +4471,7 @@
           <p:cNvPr id="4" name="">
             <a:extLst xmlns:a="http://schemas.openxmlformats.org/drawingml/2006/main">
               <a:ext uri="{FF2B5EF4-FFF2-40B4-BE49-F238E27FC236}">
-                <a16:creationId xmlns:a16="http://schemas.microsoft.com/office/drawing/2014/main" id="{B3A0E7EE-8FCD-4C9C-B728-0650FC5A07F8}"/>
+                <a16:creationId xmlns:a16="http://schemas.microsoft.com/office/drawing/2014/main" id="{9889BE56-CE3D-4BCE-AF94-865DF3943769}"/>
               </a:ext>
             </a:extLst>
           </p:cNvPr>
@@ -4528,7 +4528,7 @@
           <p:cNvPr id="5" name="">
             <a:extLst xmlns:a="http://schemas.openxmlformats.org/drawingml/2006/main">
               <a:ext uri="{FF2B5EF4-FFF2-40B4-BE49-F238E27FC236}">
-                <a16:creationId xmlns:a16="http://schemas.microsoft.com/office/drawing/2014/main" id="{4EF41828-CE8E-464C-8ACB-6C1C5C26B30D}"/>
+                <a16:creationId xmlns:a16="http://schemas.microsoft.com/office/drawing/2014/main" id="{C1362EF1-86DA-4CBB-BE54-8E887BF10530}"/>
               </a:ext>
             </a:extLst>
           </p:cNvPr>
@@ -4585,7 +4585,7 @@
           <p:cNvPr id="6" name="">
             <a:extLst xmlns:a="http://schemas.openxmlformats.org/drawingml/2006/main">
               <a:ext uri="{FF2B5EF4-FFF2-40B4-BE49-F238E27FC236}">
-                <a16:creationId xmlns:a16="http://schemas.microsoft.com/office/drawing/2014/main" id="{F524B22C-2B9D-4F93-9675-51DE6BDD5975}"/>
+                <a16:creationId xmlns:a16="http://schemas.microsoft.com/office/drawing/2014/main" id="{9BB9A82C-D3BB-4462-B864-F98C3ECEBF62}"/>
               </a:ext>
             </a:extLst>
           </p:cNvPr>
@@ -4642,7 +4642,7 @@
           <p:cNvPr id="7" name="">
             <a:extLst xmlns:a="http://schemas.openxmlformats.org/drawingml/2006/main">
               <a:ext uri="{FF2B5EF4-FFF2-40B4-BE49-F238E27FC236}">
-                <a16:creationId xmlns:a16="http://schemas.microsoft.com/office/drawing/2014/main" id="{7848CF10-B6C7-4059-AFE8-6C904C3610B4}"/>
+                <a16:creationId xmlns:a16="http://schemas.microsoft.com/office/drawing/2014/main" id="{8064669C-BF7B-46BE-80D7-63490826BD13}"/>
               </a:ext>
             </a:extLst>
           </p:cNvPr>
@@ -4674,7 +4674,7 @@
           <p:cNvPr id="8" name="">
             <a:extLst xmlns:a="http://schemas.openxmlformats.org/drawingml/2006/main">
               <a:ext uri="{FF2B5EF4-FFF2-40B4-BE49-F238E27FC236}">
-                <a16:creationId xmlns:a16="http://schemas.microsoft.com/office/drawing/2014/main" id="{DA8F62E3-5AD0-4A73-A833-537A82DFEAEA}"/>
+                <a16:creationId xmlns:a16="http://schemas.microsoft.com/office/drawing/2014/main" id="{8CED8719-12BD-4185-80C6-B611C00BCEE3}"/>
               </a:ext>
             </a:extLst>
           </p:cNvPr>
@@ -4731,7 +4731,7 @@
           <p:cNvPr id="9" name="">
             <a:extLst xmlns:a="http://schemas.openxmlformats.org/drawingml/2006/main">
               <a:ext uri="{FF2B5EF4-FFF2-40B4-BE49-F238E27FC236}">
-                <a16:creationId xmlns:a16="http://schemas.microsoft.com/office/drawing/2014/main" id="{C2A17EFB-14C1-4E82-A2EB-D5FFA2EE4E67}"/>
+                <a16:creationId xmlns:a16="http://schemas.microsoft.com/office/drawing/2014/main" id="{338C1F0D-C280-4A7E-9754-0CFAAB8A0842}"/>
               </a:ext>
             </a:extLst>
           </p:cNvPr>
@@ -4788,7 +4788,7 @@
           <p:cNvPr id="10" name="">
             <a:extLst xmlns:a="http://schemas.openxmlformats.org/drawingml/2006/main">
               <a:ext uri="{FF2B5EF4-FFF2-40B4-BE49-F238E27FC236}">
-                <a16:creationId xmlns:a16="http://schemas.microsoft.com/office/drawing/2014/main" id="{D134D64E-EBAA-4BFD-A140-77180246B366}"/>
+                <a16:creationId xmlns:a16="http://schemas.microsoft.com/office/drawing/2014/main" id="{C4420AE9-C998-490A-8941-206FB22CBED5}"/>
               </a:ext>
             </a:extLst>
           </p:cNvPr>
@@ -4822,7 +4822,7 @@
           <p:cNvPr id="11" name="">
             <a:extLst xmlns:a="http://schemas.openxmlformats.org/drawingml/2006/main">
               <a:ext uri="{FF2B5EF4-FFF2-40B4-BE49-F238E27FC236}">
-                <a16:creationId xmlns:a16="http://schemas.microsoft.com/office/drawing/2014/main" id="{4FEC4EA2-2A69-4CA0-A034-4895419054D8}"/>
+                <a16:creationId xmlns:a16="http://schemas.microsoft.com/office/drawing/2014/main" id="{3A183E62-7789-47E8-9453-4265EB566266}"/>
               </a:ext>
             </a:extLst>
           </p:cNvPr>
@@ -4854,7 +4854,7 @@
           <p:cNvPr id="12" name="">
             <a:extLst xmlns:a="http://schemas.openxmlformats.org/drawingml/2006/main">
               <a:ext uri="{FF2B5EF4-FFF2-40B4-BE49-F238E27FC236}">
-                <a16:creationId xmlns:a16="http://schemas.microsoft.com/office/drawing/2014/main" id="{0205055D-5EDB-4949-A684-DC5C4BAD090A}"/>
+                <a16:creationId xmlns:a16="http://schemas.microsoft.com/office/drawing/2014/main" id="{23114F05-58EB-46D8-8E2B-1A33C473A00B}"/>
               </a:ext>
             </a:extLst>
           </p:cNvPr>
@@ -4911,7 +4911,7 @@
           <p:cNvPr id="13" name="">
             <a:extLst xmlns:a="http://schemas.openxmlformats.org/drawingml/2006/main">
               <a:ext uri="{FF2B5EF4-FFF2-40B4-BE49-F238E27FC236}">
-                <a16:creationId xmlns:a16="http://schemas.microsoft.com/office/drawing/2014/main" id="{26B39EDF-4C33-403B-920F-EC53EBECCE22}"/>
+                <a16:creationId xmlns:a16="http://schemas.microsoft.com/office/drawing/2014/main" id="{D9C75BD1-1B9E-4830-A3D5-B56BEAEBFB14}"/>
               </a:ext>
             </a:extLst>
           </p:cNvPr>
@@ -4968,7 +4968,7 @@
           <p:cNvPr id="14" name="">
             <a:extLst xmlns:a="http://schemas.openxmlformats.org/drawingml/2006/main">
               <a:ext uri="{FF2B5EF4-FFF2-40B4-BE49-F238E27FC236}">
-                <a16:creationId xmlns:a16="http://schemas.microsoft.com/office/drawing/2014/main" id="{A7494D6C-88A1-4DE1-A116-A4BF3F6E0418}"/>
+                <a16:creationId xmlns:a16="http://schemas.microsoft.com/office/drawing/2014/main" id="{9C92FC89-3134-4041-BE43-2DF665CFF228}"/>
               </a:ext>
             </a:extLst>
           </p:cNvPr>
@@ -5002,7 +5002,7 @@
           <p:cNvPr id="15" name="">
             <a:extLst xmlns:a="http://schemas.openxmlformats.org/drawingml/2006/main">
               <a:ext uri="{FF2B5EF4-FFF2-40B4-BE49-F238E27FC236}">
-                <a16:creationId xmlns:a16="http://schemas.microsoft.com/office/drawing/2014/main" id="{B93CAEEE-D66F-46A1-A146-82BBEE52F866}"/>
+                <a16:creationId xmlns:a16="http://schemas.microsoft.com/office/drawing/2014/main" id="{7CE58F95-3581-4A72-B94C-0DD5F54BDB66}"/>
               </a:ext>
             </a:extLst>
           </p:cNvPr>
@@ -5034,7 +5034,7 @@
           <p:cNvPr id="16" name="">
             <a:extLst xmlns:a="http://schemas.openxmlformats.org/drawingml/2006/main">
               <a:ext uri="{FF2B5EF4-FFF2-40B4-BE49-F238E27FC236}">
-                <a16:creationId xmlns:a16="http://schemas.microsoft.com/office/drawing/2014/main" id="{80834166-2132-4A71-A40E-290BEACF3EA4}"/>
+                <a16:creationId xmlns:a16="http://schemas.microsoft.com/office/drawing/2014/main" id="{2EDDA891-A476-4B3F-AAB7-2D1DBDD85279}"/>
               </a:ext>
             </a:extLst>
           </p:cNvPr>
@@ -5091,7 +5091,7 @@
           <p:cNvPr id="17" name="">
             <a:extLst xmlns:a="http://schemas.openxmlformats.org/drawingml/2006/main">
               <a:ext uri="{FF2B5EF4-FFF2-40B4-BE49-F238E27FC236}">
-                <a16:creationId xmlns:a16="http://schemas.microsoft.com/office/drawing/2014/main" id="{84605ED2-3B24-41CD-8DD3-14B82E39F7EF}"/>
+                <a16:creationId xmlns:a16="http://schemas.microsoft.com/office/drawing/2014/main" id="{A77912B8-1FF7-435B-A8B6-9044F9BE24F8}"/>
               </a:ext>
             </a:extLst>
           </p:cNvPr>
@@ -5148,7 +5148,7 @@
           <p:cNvPr id="18" name="">
             <a:extLst xmlns:a="http://schemas.openxmlformats.org/drawingml/2006/main">
               <a:ext uri="{FF2B5EF4-FFF2-40B4-BE49-F238E27FC236}">
-                <a16:creationId xmlns:a16="http://schemas.microsoft.com/office/drawing/2014/main" id="{FDF0BDE5-FB53-49A1-8695-CD735372383D}"/>
+                <a16:creationId xmlns:a16="http://schemas.microsoft.com/office/drawing/2014/main" id="{C3332D77-D5B2-43D2-975B-36A4B1064FC9}"/>
               </a:ext>
             </a:extLst>
           </p:cNvPr>
@@ -5182,7 +5182,7 @@
           <p:cNvPr id="19" name="">
             <a:extLst xmlns:a="http://schemas.openxmlformats.org/drawingml/2006/main">
               <a:ext uri="{FF2B5EF4-FFF2-40B4-BE49-F238E27FC236}">
-                <a16:creationId xmlns:a16="http://schemas.microsoft.com/office/drawing/2014/main" id="{F572B059-DC27-4D9C-8A25-C639A4DF7429}"/>
+                <a16:creationId xmlns:a16="http://schemas.microsoft.com/office/drawing/2014/main" id="{89783A9A-38A4-4403-8481-52C943D2FF89}"/>
               </a:ext>
             </a:extLst>
           </p:cNvPr>
@@ -5214,7 +5214,7 @@
           <p:cNvPr id="20" name="">
             <a:extLst xmlns:a="http://schemas.openxmlformats.org/drawingml/2006/main">
               <a:ext uri="{FF2B5EF4-FFF2-40B4-BE49-F238E27FC236}">
-                <a16:creationId xmlns:a16="http://schemas.microsoft.com/office/drawing/2014/main" id="{7531E610-CFBF-4C84-9A0F-4D30E95B081D}"/>
+                <a16:creationId xmlns:a16="http://schemas.microsoft.com/office/drawing/2014/main" id="{3EE6E871-7738-4A7C-8108-31191F78B599}"/>
               </a:ext>
             </a:extLst>
           </p:cNvPr>
@@ -5271,7 +5271,7 @@
           <p:cNvPr id="21" name="">
             <a:extLst xmlns:a="http://schemas.openxmlformats.org/drawingml/2006/main">
               <a:ext uri="{FF2B5EF4-FFF2-40B4-BE49-F238E27FC236}">
-                <a16:creationId xmlns:a16="http://schemas.microsoft.com/office/drawing/2014/main" id="{60407003-218A-42C7-B0E7-E8488634B11B}"/>
+                <a16:creationId xmlns:a16="http://schemas.microsoft.com/office/drawing/2014/main" id="{7B844661-C86A-44E8-AD59-F49802D3914E}"/>
               </a:ext>
             </a:extLst>
           </p:cNvPr>
@@ -5328,7 +5328,7 @@
           <p:cNvPr id="22" name="">
             <a:extLst xmlns:a="http://schemas.openxmlformats.org/drawingml/2006/main">
               <a:ext uri="{FF2B5EF4-FFF2-40B4-BE49-F238E27FC236}">
-                <a16:creationId xmlns:a16="http://schemas.microsoft.com/office/drawing/2014/main" id="{0E2A648B-07E2-4E9A-953C-B2DCF41CFFAC}"/>
+                <a16:creationId xmlns:a16="http://schemas.microsoft.com/office/drawing/2014/main" id="{1FAD6C78-6F66-4CDF-BCC1-20F8D074D96B}"/>
               </a:ext>
             </a:extLst>
           </p:cNvPr>
@@ -5383,7 +5383,7 @@
     </p:spTree>
     <p:extLst>
       <p:ext uri="{BB962C8B-B14F-4D97-AF65-F5344CB8AC3E}">
-        <p14:creationId xmlns:p14="http://schemas.microsoft.com/office/powerpoint/2010/main" val="1279733443"/>
+        <p14:creationId xmlns:p14="http://schemas.microsoft.com/office/powerpoint/2010/main" val="1073037261"/>
       </p:ext>
     </p:extLst>
   </p:cSld>
@@ -5584,7 +5584,7 @@
           <p:cNvPr id="23" name="">
             <a:extLst xmlns:a="http://schemas.openxmlformats.org/drawingml/2006/main">
               <a:ext uri="{FF2B5EF4-FFF2-40B4-BE49-F238E27FC236}">
-                <a16:creationId xmlns:a16="http://schemas.microsoft.com/office/drawing/2014/main" id="{B3553456-A6A9-4071-9633-7B546376CA86}"/>
+                <a16:creationId xmlns:a16="http://schemas.microsoft.com/office/drawing/2014/main" id="{170865E0-C376-4F84-8089-0BF678242F5C}"/>
               </a:ext>
             </a:extLst>
           </p:cNvPr>
@@ -5616,7 +5616,7 @@
           <p:cNvPr id="2" name="">
             <a:extLst xmlns:a="http://schemas.openxmlformats.org/drawingml/2006/main">
               <a:ext uri="{FF2B5EF4-FFF2-40B4-BE49-F238E27FC236}">
-                <a16:creationId xmlns:a16="http://schemas.microsoft.com/office/drawing/2014/main" id="{8B91B6B4-29FD-49A6-9E68-0FAD82818434}"/>
+                <a16:creationId xmlns:a16="http://schemas.microsoft.com/office/drawing/2014/main" id="{234E210A-C481-4F98-A4FE-23377C7B34C1}"/>
               </a:ext>
             </a:extLst>
           </p:cNvPr>
@@ -5673,7 +5673,7 @@
           <p:cNvPr id="3" name="">
             <a:extLst xmlns:a="http://schemas.openxmlformats.org/drawingml/2006/main">
               <a:ext uri="{FF2B5EF4-FFF2-40B4-BE49-F238E27FC236}">
-                <a16:creationId xmlns:a16="http://schemas.microsoft.com/office/drawing/2014/main" id="{D7E000FF-E68D-4DC3-BC40-FB1FE83D0EEA}"/>
+                <a16:creationId xmlns:a16="http://schemas.microsoft.com/office/drawing/2014/main" id="{95D1AD96-1E5A-401F-85CC-70BBBD489B28}"/>
               </a:ext>
             </a:extLst>
           </p:cNvPr>
@@ -5705,7 +5705,7 @@
           <p:cNvPr id="4" name="">
             <a:extLst xmlns:a="http://schemas.openxmlformats.org/drawingml/2006/main">
               <a:ext uri="{FF2B5EF4-FFF2-40B4-BE49-F238E27FC236}">
-                <a16:creationId xmlns:a16="http://schemas.microsoft.com/office/drawing/2014/main" id="{A4F3C761-B26C-4576-B335-740255DD16DB}"/>
+                <a16:creationId xmlns:a16="http://schemas.microsoft.com/office/drawing/2014/main" id="{3775155D-BEB2-420C-A85E-A1B8F69C3D3B}"/>
               </a:ext>
             </a:extLst>
           </p:cNvPr>
@@ -5762,7 +5762,7 @@
           <p:cNvPr id="5" name="">
             <a:extLst xmlns:a="http://schemas.openxmlformats.org/drawingml/2006/main">
               <a:ext uri="{FF2B5EF4-FFF2-40B4-BE49-F238E27FC236}">
-                <a16:creationId xmlns:a16="http://schemas.microsoft.com/office/drawing/2014/main" id="{88D3A82F-2D0B-4AAE-AC21-E68CD3D96DBD}"/>
+                <a16:creationId xmlns:a16="http://schemas.microsoft.com/office/drawing/2014/main" id="{8C326A00-A34A-41CD-997D-B27E7E395A52}"/>
               </a:ext>
             </a:extLst>
           </p:cNvPr>
@@ -5819,7 +5819,7 @@
           <p:cNvPr id="6" name="">
             <a:extLst xmlns:a="http://schemas.openxmlformats.org/drawingml/2006/main">
               <a:ext uri="{FF2B5EF4-FFF2-40B4-BE49-F238E27FC236}">
-                <a16:creationId xmlns:a16="http://schemas.microsoft.com/office/drawing/2014/main" id="{850549BB-C7CC-43DA-B129-B1D2E8648867}"/>
+                <a16:creationId xmlns:a16="http://schemas.microsoft.com/office/drawing/2014/main" id="{80594396-26FC-4E8C-A452-F5E69FA03F59}"/>
               </a:ext>
             </a:extLst>
           </p:cNvPr>
@@ -5876,7 +5876,7 @@
           <p:cNvPr id="7" name="">
             <a:extLst xmlns:a="http://schemas.openxmlformats.org/drawingml/2006/main">
               <a:ext uri="{FF2B5EF4-FFF2-40B4-BE49-F238E27FC236}">
-                <a16:creationId xmlns:a16="http://schemas.microsoft.com/office/drawing/2014/main" id="{E0C49E01-ECC8-430B-8BDC-D58B90B5E7B1}"/>
+                <a16:creationId xmlns:a16="http://schemas.microsoft.com/office/drawing/2014/main" id="{AE5242E3-256E-42FE-9648-BE5861C48159}"/>
               </a:ext>
             </a:extLst>
           </p:cNvPr>
@@ -5908,7 +5908,7 @@
           <p:cNvPr id="8" name="">
             <a:extLst xmlns:a="http://schemas.openxmlformats.org/drawingml/2006/main">
               <a:ext uri="{FF2B5EF4-FFF2-40B4-BE49-F238E27FC236}">
-                <a16:creationId xmlns:a16="http://schemas.microsoft.com/office/drawing/2014/main" id="{D221EA83-483F-417B-812A-59FCF9002E29}"/>
+                <a16:creationId xmlns:a16="http://schemas.microsoft.com/office/drawing/2014/main" id="{D5690C74-54C4-4BF3-A423-DEC1FFB7C315}"/>
               </a:ext>
             </a:extLst>
           </p:cNvPr>
@@ -5965,7 +5965,7 @@
           <p:cNvPr id="9" name="">
             <a:extLst xmlns:a="http://schemas.openxmlformats.org/drawingml/2006/main">
               <a:ext uri="{FF2B5EF4-FFF2-40B4-BE49-F238E27FC236}">
-                <a16:creationId xmlns:a16="http://schemas.microsoft.com/office/drawing/2014/main" id="{1DC9346E-08B6-42BA-A88C-874C561D47C3}"/>
+                <a16:creationId xmlns:a16="http://schemas.microsoft.com/office/drawing/2014/main" id="{68D4A661-60FB-45AA-8C01-F408E00F788D}"/>
               </a:ext>
             </a:extLst>
           </p:cNvPr>
@@ -6022,7 +6022,7 @@
           <p:cNvPr id="10" name="">
             <a:extLst xmlns:a="http://schemas.openxmlformats.org/drawingml/2006/main">
               <a:ext uri="{FF2B5EF4-FFF2-40B4-BE49-F238E27FC236}">
-                <a16:creationId xmlns:a16="http://schemas.microsoft.com/office/drawing/2014/main" id="{19B61D6B-7AE2-4765-84DD-6A6629D7CFFB}"/>
+                <a16:creationId xmlns:a16="http://schemas.microsoft.com/office/drawing/2014/main" id="{C041C10C-6E5D-4681-98BC-9E17235B45DB}"/>
               </a:ext>
             </a:extLst>
           </p:cNvPr>
@@ -6056,7 +6056,7 @@
           <p:cNvPr id="11" name="">
             <a:extLst xmlns:a="http://schemas.openxmlformats.org/drawingml/2006/main">
               <a:ext uri="{FF2B5EF4-FFF2-40B4-BE49-F238E27FC236}">
-                <a16:creationId xmlns:a16="http://schemas.microsoft.com/office/drawing/2014/main" id="{D535D5B3-C29F-46CC-804B-5B1B8419833C}"/>
+                <a16:creationId xmlns:a16="http://schemas.microsoft.com/office/drawing/2014/main" id="{AF3826F4-F227-4408-9FE3-7F72D7D01E57}"/>
               </a:ext>
             </a:extLst>
           </p:cNvPr>
@@ -6088,7 +6088,7 @@
           <p:cNvPr id="12" name="">
             <a:extLst xmlns:a="http://schemas.openxmlformats.org/drawingml/2006/main">
               <a:ext uri="{FF2B5EF4-FFF2-40B4-BE49-F238E27FC236}">
-                <a16:creationId xmlns:a16="http://schemas.microsoft.com/office/drawing/2014/main" id="{3E187680-D82A-4E0F-BF50-FE8404415E53}"/>
+                <a16:creationId xmlns:a16="http://schemas.microsoft.com/office/drawing/2014/main" id="{C11F9506-27EA-4A8E-AE36-B79113E1D161}"/>
               </a:ext>
             </a:extLst>
           </p:cNvPr>
@@ -6145,7 +6145,7 @@
           <p:cNvPr id="13" name="">
             <a:extLst xmlns:a="http://schemas.openxmlformats.org/drawingml/2006/main">
               <a:ext uri="{FF2B5EF4-FFF2-40B4-BE49-F238E27FC236}">
-                <a16:creationId xmlns:a16="http://schemas.microsoft.com/office/drawing/2014/main" id="{885CAE35-5F5D-4CE0-956A-18E77257462A}"/>
+                <a16:creationId xmlns:a16="http://schemas.microsoft.com/office/drawing/2014/main" id="{F8044999-F3CD-4D5F-8019-C081D6A9558E}"/>
               </a:ext>
             </a:extLst>
           </p:cNvPr>
@@ -6202,7 +6202,7 @@
           <p:cNvPr id="14" name="">
             <a:extLst xmlns:a="http://schemas.openxmlformats.org/drawingml/2006/main">
               <a:ext uri="{FF2B5EF4-FFF2-40B4-BE49-F238E27FC236}">
-                <a16:creationId xmlns:a16="http://schemas.microsoft.com/office/drawing/2014/main" id="{E374F5E2-23A3-4DF2-B1A7-CAB4CBFD5457}"/>
+                <a16:creationId xmlns:a16="http://schemas.microsoft.com/office/drawing/2014/main" id="{B51FF189-3139-4789-8016-15455AD9D146}"/>
               </a:ext>
             </a:extLst>
           </p:cNvPr>
@@ -6236,7 +6236,7 @@
           <p:cNvPr id="15" name="">
             <a:extLst xmlns:a="http://schemas.openxmlformats.org/drawingml/2006/main">
               <a:ext uri="{FF2B5EF4-FFF2-40B4-BE49-F238E27FC236}">
-                <a16:creationId xmlns:a16="http://schemas.microsoft.com/office/drawing/2014/main" id="{70392C38-8910-4D18-9C9F-65B66BB67EF2}"/>
+                <a16:creationId xmlns:a16="http://schemas.microsoft.com/office/drawing/2014/main" id="{E0DC50F9-BA34-4160-87D5-991223028EE5}"/>
               </a:ext>
             </a:extLst>
           </p:cNvPr>
@@ -6268,7 +6268,7 @@
           <p:cNvPr id="16" name="">
             <a:extLst xmlns:a="http://schemas.openxmlformats.org/drawingml/2006/main">
               <a:ext uri="{FF2B5EF4-FFF2-40B4-BE49-F238E27FC236}">
-                <a16:creationId xmlns:a16="http://schemas.microsoft.com/office/drawing/2014/main" id="{C61DEB83-E547-43CA-A5F1-2B9F92C1D78E}"/>
+                <a16:creationId xmlns:a16="http://schemas.microsoft.com/office/drawing/2014/main" id="{8D6096FE-4F7A-435B-A13D-D5905CA5A1B1}"/>
               </a:ext>
             </a:extLst>
           </p:cNvPr>
@@ -6325,7 +6325,7 @@
           <p:cNvPr id="17" name="">
             <a:extLst xmlns:a="http://schemas.openxmlformats.org/drawingml/2006/main">
               <a:ext uri="{FF2B5EF4-FFF2-40B4-BE49-F238E27FC236}">
-                <a16:creationId xmlns:a16="http://schemas.microsoft.com/office/drawing/2014/main" id="{39FE0778-1D94-45D2-8188-B4109C865B36}"/>
+                <a16:creationId xmlns:a16="http://schemas.microsoft.com/office/drawing/2014/main" id="{C06CB7CE-F6ED-4FDE-BB3C-01955AC1E355}"/>
               </a:ext>
             </a:extLst>
           </p:cNvPr>
@@ -6382,7 +6382,7 @@
           <p:cNvPr id="18" name="">
             <a:extLst xmlns:a="http://schemas.openxmlformats.org/drawingml/2006/main">
               <a:ext uri="{FF2B5EF4-FFF2-40B4-BE49-F238E27FC236}">
-                <a16:creationId xmlns:a16="http://schemas.microsoft.com/office/drawing/2014/main" id="{F88FADCB-2E92-4227-8AAB-B519164544F2}"/>
+                <a16:creationId xmlns:a16="http://schemas.microsoft.com/office/drawing/2014/main" id="{844A1296-C70B-456C-90D2-E3684C35AEBF}"/>
               </a:ext>
             </a:extLst>
           </p:cNvPr>
@@ -6416,7 +6416,7 @@
           <p:cNvPr id="19" name="">
             <a:extLst xmlns:a="http://schemas.openxmlformats.org/drawingml/2006/main">
               <a:ext uri="{FF2B5EF4-FFF2-40B4-BE49-F238E27FC236}">
-                <a16:creationId xmlns:a16="http://schemas.microsoft.com/office/drawing/2014/main" id="{197F0AB6-C591-4C20-95BA-642447DB1BA1}"/>
+                <a16:creationId xmlns:a16="http://schemas.microsoft.com/office/drawing/2014/main" id="{907A82FD-3AC4-4768-BCDF-C01199C8B27F}"/>
               </a:ext>
             </a:extLst>
           </p:cNvPr>
@@ -6448,7 +6448,7 @@
           <p:cNvPr id="20" name="">
             <a:extLst xmlns:a="http://schemas.openxmlformats.org/drawingml/2006/main">
               <a:ext uri="{FF2B5EF4-FFF2-40B4-BE49-F238E27FC236}">
-                <a16:creationId xmlns:a16="http://schemas.microsoft.com/office/drawing/2014/main" id="{C0998E96-D594-4E82-BAA8-37030C63C0EF}"/>
+                <a16:creationId xmlns:a16="http://schemas.microsoft.com/office/drawing/2014/main" id="{947D65A9-C33C-4563-8DB2-241372ED5BDA}"/>
               </a:ext>
             </a:extLst>
           </p:cNvPr>
@@ -6505,7 +6505,7 @@
           <p:cNvPr id="21" name="">
             <a:extLst xmlns:a="http://schemas.openxmlformats.org/drawingml/2006/main">
               <a:ext uri="{FF2B5EF4-FFF2-40B4-BE49-F238E27FC236}">
-                <a16:creationId xmlns:a16="http://schemas.microsoft.com/office/drawing/2014/main" id="{B4433F78-D45A-4615-A7C2-97B5C095F8AF}"/>
+                <a16:creationId xmlns:a16="http://schemas.microsoft.com/office/drawing/2014/main" id="{4BF2029D-1A16-475E-9F7A-CE469032FDC4}"/>
               </a:ext>
             </a:extLst>
           </p:cNvPr>
@@ -6562,7 +6562,7 @@
           <p:cNvPr id="22" name="">
             <a:extLst xmlns:a="http://schemas.openxmlformats.org/drawingml/2006/main">
               <a:ext uri="{FF2B5EF4-FFF2-40B4-BE49-F238E27FC236}">
-                <a16:creationId xmlns:a16="http://schemas.microsoft.com/office/drawing/2014/main" id="{D5FDB448-7299-4BDA-921B-66A7BD197184}"/>
+                <a16:creationId xmlns:a16="http://schemas.microsoft.com/office/drawing/2014/main" id="{1372418F-DE6E-4EC2-A500-BA0D19D74C47}"/>
               </a:ext>
             </a:extLst>
           </p:cNvPr>
@@ -6617,7 +6617,7 @@
     </p:spTree>
     <p:extLst>
       <p:ext uri="{BB962C8B-B14F-4D97-AF65-F5344CB8AC3E}">
-        <p14:creationId xmlns:p14="http://schemas.microsoft.com/office/powerpoint/2010/main" val="400147235"/>
+        <p14:creationId xmlns:p14="http://schemas.microsoft.com/office/powerpoint/2010/main" val="1561045362"/>
       </p:ext>
     </p:extLst>
   </p:cSld>
@@ -6818,7 +6818,7 @@
           <p:cNvPr id="16" name="">
             <a:extLst xmlns:a="http://schemas.openxmlformats.org/drawingml/2006/main">
               <a:ext uri="{FF2B5EF4-FFF2-40B4-BE49-F238E27FC236}">
-                <a16:creationId xmlns:a16="http://schemas.microsoft.com/office/drawing/2014/main" id="{F6B8EF49-2EE0-4812-B0B5-D6025095B4D4}"/>
+                <a16:creationId xmlns:a16="http://schemas.microsoft.com/office/drawing/2014/main" id="{851D0875-7F2A-4657-9F86-0AAF791E4A0F}"/>
               </a:ext>
             </a:extLst>
           </p:cNvPr>
@@ -6850,7 +6850,7 @@
           <p:cNvPr id="2" name="">
             <a:extLst xmlns:a="http://schemas.openxmlformats.org/drawingml/2006/main">
               <a:ext uri="{FF2B5EF4-FFF2-40B4-BE49-F238E27FC236}">
-                <a16:creationId xmlns:a16="http://schemas.microsoft.com/office/drawing/2014/main" id="{B4D15B4C-A421-472C-BCF2-B2694D24B58C}"/>
+                <a16:creationId xmlns:a16="http://schemas.microsoft.com/office/drawing/2014/main" id="{FA8F07AC-697E-450F-A7CE-81BE4A542902}"/>
               </a:ext>
             </a:extLst>
           </p:cNvPr>
@@ -6907,7 +6907,7 @@
           <p:cNvPr id="3" name="">
             <a:extLst xmlns:a="http://schemas.openxmlformats.org/drawingml/2006/main">
               <a:ext uri="{FF2B5EF4-FFF2-40B4-BE49-F238E27FC236}">
-                <a16:creationId xmlns:a16="http://schemas.microsoft.com/office/drawing/2014/main" id="{99ECE55B-07E0-472B-B0F9-C5E24DA031EF}"/>
+                <a16:creationId xmlns:a16="http://schemas.microsoft.com/office/drawing/2014/main" id="{85829BA7-2C66-4415-BD62-F9A596234F79}"/>
               </a:ext>
             </a:extLst>
           </p:cNvPr>
@@ -6939,7 +6939,7 @@
           <p:cNvPr id="4" name="">
             <a:extLst xmlns:a="http://schemas.openxmlformats.org/drawingml/2006/main">
               <a:ext uri="{FF2B5EF4-FFF2-40B4-BE49-F238E27FC236}">
-                <a16:creationId xmlns:a16="http://schemas.microsoft.com/office/drawing/2014/main" id="{5AB4493F-12A8-427C-8A78-E0CD4E07EB4E}"/>
+                <a16:creationId xmlns:a16="http://schemas.microsoft.com/office/drawing/2014/main" id="{490D72CF-9A5C-4683-B8CC-309EB76813B3}"/>
               </a:ext>
             </a:extLst>
           </p:cNvPr>
@@ -6996,7 +6996,7 @@
           <p:cNvPr id="5" name="">
             <a:extLst xmlns:a="http://schemas.openxmlformats.org/drawingml/2006/main">
               <a:ext uri="{FF2B5EF4-FFF2-40B4-BE49-F238E27FC236}">
-                <a16:creationId xmlns:a16="http://schemas.microsoft.com/office/drawing/2014/main" id="{A3DB038D-9089-4447-9995-81889DAA7CD1}"/>
+                <a16:creationId xmlns:a16="http://schemas.microsoft.com/office/drawing/2014/main" id="{C439C799-BC3E-4237-A004-36E804336516}"/>
               </a:ext>
             </a:extLst>
           </p:cNvPr>
@@ -7053,7 +7053,7 @@
           <p:cNvPr id="6" name="">
             <a:extLst xmlns:a="http://schemas.openxmlformats.org/drawingml/2006/main">
               <a:ext uri="{FF2B5EF4-FFF2-40B4-BE49-F238E27FC236}">
-                <a16:creationId xmlns:a16="http://schemas.microsoft.com/office/drawing/2014/main" id="{4D95EFE4-6F35-435F-9666-786A75BE2FA8}"/>
+                <a16:creationId xmlns:a16="http://schemas.microsoft.com/office/drawing/2014/main" id="{9CDAC731-3C93-47B1-B0EA-52A1191A86D6}"/>
               </a:ext>
             </a:extLst>
           </p:cNvPr>
@@ -7110,7 +7110,7 @@
           <p:cNvPr id="7" name="">
             <a:extLst xmlns:a="http://schemas.openxmlformats.org/drawingml/2006/main">
               <a:ext uri="{FF2B5EF4-FFF2-40B4-BE49-F238E27FC236}">
-                <a16:creationId xmlns:a16="http://schemas.microsoft.com/office/drawing/2014/main" id="{270EF61A-0FFE-4A40-930E-6F9BC6692EDB}"/>
+                <a16:creationId xmlns:a16="http://schemas.microsoft.com/office/drawing/2014/main" id="{B6D6BD85-ECFD-4B80-B8D3-DFA21E0B52D4}"/>
               </a:ext>
             </a:extLst>
           </p:cNvPr>
@@ -7142,7 +7142,7 @@
           <p:cNvPr id="8" name="">
             <a:extLst xmlns:a="http://schemas.openxmlformats.org/drawingml/2006/main">
               <a:ext uri="{FF2B5EF4-FFF2-40B4-BE49-F238E27FC236}">
-                <a16:creationId xmlns:a16="http://schemas.microsoft.com/office/drawing/2014/main" id="{0A9259FB-090A-4ABD-A1B7-5B943BD0311B}"/>
+                <a16:creationId xmlns:a16="http://schemas.microsoft.com/office/drawing/2014/main" id="{B6E0A7CF-63C4-49B8-9C79-B9CDD1C500E2}"/>
               </a:ext>
             </a:extLst>
           </p:cNvPr>
@@ -7199,7 +7199,7 @@
           <p:cNvPr id="9" name="">
             <a:extLst xmlns:a="http://schemas.openxmlformats.org/drawingml/2006/main">
               <a:ext uri="{FF2B5EF4-FFF2-40B4-BE49-F238E27FC236}">
-                <a16:creationId xmlns:a16="http://schemas.microsoft.com/office/drawing/2014/main" id="{F61B5728-7842-41D5-A075-FBFF7AA120E9}"/>
+                <a16:creationId xmlns:a16="http://schemas.microsoft.com/office/drawing/2014/main" id="{EF85ABDC-BA95-493D-BBF4-5B94CB3D78F6}"/>
               </a:ext>
             </a:extLst>
           </p:cNvPr>
@@ -7256,7 +7256,7 @@
           <p:cNvPr id="10" name="">
             <a:extLst xmlns:a="http://schemas.openxmlformats.org/drawingml/2006/main">
               <a:ext uri="{FF2B5EF4-FFF2-40B4-BE49-F238E27FC236}">
-                <a16:creationId xmlns:a16="http://schemas.microsoft.com/office/drawing/2014/main" id="{D0F6C75C-10E1-47A0-96DF-36589DB46F4D}"/>
+                <a16:creationId xmlns:a16="http://schemas.microsoft.com/office/drawing/2014/main" id="{52A1358C-53A7-4F25-9806-64A24D23364C}"/>
               </a:ext>
             </a:extLst>
           </p:cNvPr>
@@ -7313,7 +7313,7 @@
           <p:cNvPr id="11" name="">
             <a:extLst xmlns:a="http://schemas.openxmlformats.org/drawingml/2006/main">
               <a:ext uri="{FF2B5EF4-FFF2-40B4-BE49-F238E27FC236}">
-                <a16:creationId xmlns:a16="http://schemas.microsoft.com/office/drawing/2014/main" id="{35A8433A-BD36-4CB7-9410-BF73F2918642}"/>
+                <a16:creationId xmlns:a16="http://schemas.microsoft.com/office/drawing/2014/main" id="{5C6EC275-F9D2-4B61-8617-EC1DBF9177F4}"/>
               </a:ext>
             </a:extLst>
           </p:cNvPr>
@@ -7345,7 +7345,7 @@
           <p:cNvPr id="12" name="">
             <a:extLst xmlns:a="http://schemas.openxmlformats.org/drawingml/2006/main">
               <a:ext uri="{FF2B5EF4-FFF2-40B4-BE49-F238E27FC236}">
-                <a16:creationId xmlns:a16="http://schemas.microsoft.com/office/drawing/2014/main" id="{D3144543-3A94-42AA-AD98-91EA651F3CD9}"/>
+                <a16:creationId xmlns:a16="http://schemas.microsoft.com/office/drawing/2014/main" id="{4D8838AD-76C7-4D7E-A060-268034DA7196}"/>
               </a:ext>
             </a:extLst>
           </p:cNvPr>
@@ -7402,7 +7402,7 @@
           <p:cNvPr id="13" name="">
             <a:extLst xmlns:a="http://schemas.openxmlformats.org/drawingml/2006/main">
               <a:ext uri="{FF2B5EF4-FFF2-40B4-BE49-F238E27FC236}">
-                <a16:creationId xmlns:a16="http://schemas.microsoft.com/office/drawing/2014/main" id="{978EB86A-5ABC-4B53-82FF-553360044695}"/>
+                <a16:creationId xmlns:a16="http://schemas.microsoft.com/office/drawing/2014/main" id="{81EB55E4-2208-4C3D-B9C5-E5050A384F4B}"/>
               </a:ext>
             </a:extLst>
           </p:cNvPr>
@@ -7459,7 +7459,7 @@
           <p:cNvPr id="14" name="">
             <a:extLst xmlns:a="http://schemas.openxmlformats.org/drawingml/2006/main">
               <a:ext uri="{FF2B5EF4-FFF2-40B4-BE49-F238E27FC236}">
-                <a16:creationId xmlns:a16="http://schemas.microsoft.com/office/drawing/2014/main" id="{B2187939-4720-468F-8B48-0BB4193348F1}"/>
+                <a16:creationId xmlns:a16="http://schemas.microsoft.com/office/drawing/2014/main" id="{8DF4A334-4B83-4EED-9589-762F5B4BF1AA}"/>
               </a:ext>
             </a:extLst>
           </p:cNvPr>
@@ -7516,7 +7516,7 @@
           <p:cNvPr id="15" name="">
             <a:extLst xmlns:a="http://schemas.openxmlformats.org/drawingml/2006/main">
               <a:ext uri="{FF2B5EF4-FFF2-40B4-BE49-F238E27FC236}">
-                <a16:creationId xmlns:a16="http://schemas.microsoft.com/office/drawing/2014/main" id="{3740C40E-0A3A-40F5-AECC-B942B459C086}"/>
+                <a16:creationId xmlns:a16="http://schemas.microsoft.com/office/drawing/2014/main" id="{54B6315E-2555-47F5-B7C7-D57AC225F513}"/>
               </a:ext>
             </a:extLst>
           </p:cNvPr>
@@ -7571,7 +7571,7 @@
     </p:spTree>
     <p:extLst>
       <p:ext uri="{BB962C8B-B14F-4D97-AF65-F5344CB8AC3E}">
-        <p14:creationId xmlns:p14="http://schemas.microsoft.com/office/powerpoint/2010/main" val="2142170723"/>
+        <p14:creationId xmlns:p14="http://schemas.microsoft.com/office/powerpoint/2010/main" val="1066995178"/>
       </p:ext>
     </p:extLst>
   </p:cSld>
@@ -7769,10 +7769,10 @@
       </p:grpSpPr>
       <p:sp>
         <p:nvSpPr>
-          <p:cNvPr id="23" name="">
-            <a:extLst xmlns:a="http://schemas.openxmlformats.org/drawingml/2006/main">
-              <a:ext uri="{FF2B5EF4-FFF2-40B4-BE49-F238E27FC236}">
-                <a16:creationId xmlns:a16="http://schemas.microsoft.com/office/drawing/2014/main" id="{36BF8339-2FB3-4F5D-B387-A63059CA10B5}"/>
+          <p:cNvPr id="26" name="">
+            <a:extLst xmlns:a="http://schemas.openxmlformats.org/drawingml/2006/main">
+              <a:ext uri="{FF2B5EF4-FFF2-40B4-BE49-F238E27FC236}">
+                <a16:creationId xmlns:a16="http://schemas.microsoft.com/office/drawing/2014/main" id="{10EB4172-D28C-40B5-823B-678FC8349133}"/>
               </a:ext>
             </a:extLst>
           </p:cNvPr>
@@ -7804,7 +7804,7 @@
           <p:cNvPr id="2" name="">
             <a:extLst xmlns:a="http://schemas.openxmlformats.org/drawingml/2006/main">
               <a:ext uri="{FF2B5EF4-FFF2-40B4-BE49-F238E27FC236}">
-                <a16:creationId xmlns:a16="http://schemas.microsoft.com/office/drawing/2014/main" id="{A92CB1EC-F8FF-438F-BE4A-651C1DF77C21}"/>
+                <a16:creationId xmlns:a16="http://schemas.microsoft.com/office/drawing/2014/main" id="{C32EC43E-0C00-4DC9-8120-A84A91C51304}"/>
               </a:ext>
             </a:extLst>
           </p:cNvPr>
@@ -7861,7 +7861,7 @@
           <p:cNvPr id="3" name="">
             <a:extLst xmlns:a="http://schemas.openxmlformats.org/drawingml/2006/main">
               <a:ext uri="{FF2B5EF4-FFF2-40B4-BE49-F238E27FC236}">
-                <a16:creationId xmlns:a16="http://schemas.microsoft.com/office/drawing/2014/main" id="{F4F604D5-DE84-4BAD-9BB3-CDAE79AAA5AE}"/>
+                <a16:creationId xmlns:a16="http://schemas.microsoft.com/office/drawing/2014/main" id="{4D5595E1-4290-4CB4-947D-ED7E25FD5DD3}"/>
               </a:ext>
             </a:extLst>
           </p:cNvPr>
@@ -7893,7 +7893,7 @@
           <p:cNvPr id="4" name="">
             <a:extLst xmlns:a="http://schemas.openxmlformats.org/drawingml/2006/main">
               <a:ext uri="{FF2B5EF4-FFF2-40B4-BE49-F238E27FC236}">
-                <a16:creationId xmlns:a16="http://schemas.microsoft.com/office/drawing/2014/main" id="{6DFC1FA0-AD0B-417F-AF7B-7539AC551DBD}"/>
+                <a16:creationId xmlns:a16="http://schemas.microsoft.com/office/drawing/2014/main" id="{CD5C9605-B02F-4BEC-9BFA-23C9FAB00710}"/>
               </a:ext>
             </a:extLst>
           </p:cNvPr>
@@ -7950,7 +7950,7 @@
           <p:cNvPr id="5" name="">
             <a:extLst xmlns:a="http://schemas.openxmlformats.org/drawingml/2006/main">
               <a:ext uri="{FF2B5EF4-FFF2-40B4-BE49-F238E27FC236}">
-                <a16:creationId xmlns:a16="http://schemas.microsoft.com/office/drawing/2014/main" id="{2A9AFD9F-EC45-4513-9CEC-A9CCD820D388}"/>
+                <a16:creationId xmlns:a16="http://schemas.microsoft.com/office/drawing/2014/main" id="{F6B5164E-FF24-4EF4-AD57-696D578BAE64}"/>
               </a:ext>
             </a:extLst>
           </p:cNvPr>
@@ -8007,7 +8007,7 @@
           <p:cNvPr id="6" name="">
             <a:extLst xmlns:a="http://schemas.openxmlformats.org/drawingml/2006/main">
               <a:ext uri="{FF2B5EF4-FFF2-40B4-BE49-F238E27FC236}">
-                <a16:creationId xmlns:a16="http://schemas.microsoft.com/office/drawing/2014/main" id="{E3EC470A-22F3-44ED-860F-651939795DAB}"/>
+                <a16:creationId xmlns:a16="http://schemas.microsoft.com/office/drawing/2014/main" id="{5D8E731F-D8BE-45EB-A8D3-FFB3098F8A67}"/>
               </a:ext>
             </a:extLst>
           </p:cNvPr>
@@ -8064,7 +8064,7 @@
           <p:cNvPr id="7" name="">
             <a:extLst xmlns:a="http://schemas.openxmlformats.org/drawingml/2006/main">
               <a:ext uri="{FF2B5EF4-FFF2-40B4-BE49-F238E27FC236}">
-                <a16:creationId xmlns:a16="http://schemas.microsoft.com/office/drawing/2014/main" id="{13518E55-A3AB-404D-8FF6-E23FC92910F8}"/>
+                <a16:creationId xmlns:a16="http://schemas.microsoft.com/office/drawing/2014/main" id="{960428E9-7AFF-453A-BA63-A42C74658A8E}"/>
               </a:ext>
             </a:extLst>
           </p:cNvPr>
@@ -8096,7 +8096,7 @@
           <p:cNvPr id="8" name="">
             <a:extLst xmlns:a="http://schemas.openxmlformats.org/drawingml/2006/main">
               <a:ext uri="{FF2B5EF4-FFF2-40B4-BE49-F238E27FC236}">
-                <a16:creationId xmlns:a16="http://schemas.microsoft.com/office/drawing/2014/main" id="{E84C5002-80FA-4730-8E52-A7CF26AE003F}"/>
+                <a16:creationId xmlns:a16="http://schemas.microsoft.com/office/drawing/2014/main" id="{00846F34-FA94-4698-ADC9-C6C5F32ABF98}"/>
               </a:ext>
             </a:extLst>
           </p:cNvPr>
@@ -8153,7 +8153,7 @@
           <p:cNvPr id="9" name="">
             <a:extLst xmlns:a="http://schemas.openxmlformats.org/drawingml/2006/main">
               <a:ext uri="{FF2B5EF4-FFF2-40B4-BE49-F238E27FC236}">
-                <a16:creationId xmlns:a16="http://schemas.microsoft.com/office/drawing/2014/main" id="{0F052FBB-D111-4E85-AB0A-57481E86C38A}"/>
+                <a16:creationId xmlns:a16="http://schemas.microsoft.com/office/drawing/2014/main" id="{723C17C9-1D77-4167-9500-A7D66549634E}"/>
               </a:ext>
             </a:extLst>
           </p:cNvPr>
@@ -8210,19 +8210,19 @@
           <p:cNvPr id="10" name="">
             <a:extLst xmlns:a="http://schemas.openxmlformats.org/drawingml/2006/main">
               <a:ext uri="{FF2B5EF4-FFF2-40B4-BE49-F238E27FC236}">
-                <a16:creationId xmlns:a16="http://schemas.microsoft.com/office/drawing/2014/main" id="{D8967484-E759-43E5-A83F-A2E590C6534B}"/>
-              </a:ext>
-            </a:extLst>
-          </p:cNvPr>
-          <p:cNvSpPr>
-            <a:spLocks xmlns:a="http://schemas.openxmlformats.org/drawingml/2006/main" noGrp="1"/>
-          </p:cNvSpPr>
-          <p:nvPr/>
-        </p:nvSpPr>
-        <p:spPr>
-          <a:xfrm xmlns:a="http://schemas.openxmlformats.org/drawingml/2006/main">
-            <a:off x="914400" y="1257300"/>
-            <a:ext cx="10363200" cy="781050"/>
+                <a16:creationId xmlns:a16="http://schemas.microsoft.com/office/drawing/2014/main" id="{69B76FF6-C39B-4603-8879-E5F5E4A7E284}"/>
+              </a:ext>
+            </a:extLst>
+          </p:cNvPr>
+          <p:cNvSpPr>
+            <a:spLocks xmlns:a="http://schemas.openxmlformats.org/drawingml/2006/main" noGrp="1"/>
+          </p:cNvSpPr>
+          <p:nvPr/>
+        </p:nvSpPr>
+        <p:spPr>
+          <a:xfrm xmlns:a="http://schemas.openxmlformats.org/drawingml/2006/main">
+            <a:off x="857250" y="1219200"/>
+            <a:ext cx="10477500" cy="742950"/>
           </a:xfrm>
           <a:prstGeom xmlns:a="http://schemas.openxmlformats.org/drawingml/2006/main" prst="rect">
             <a:avLst/>
@@ -8239,7 +8239,7 @@
           <a:lstStyle xmlns:a="http://schemas.openxmlformats.org/drawingml/2006/main"/>
           <a:p xmlns:a="http://schemas.openxmlformats.org/drawingml/2006/main">
             <a:pPr algn="ctr">
-              <a:defRPr sz="2175" b="1">
+              <a:defRPr sz="2100" b="1">
                 <a:solidFill>
                   <a:srgbClr val="17253A"/>
                 </a:solidFill>
@@ -8249,7 +8249,7 @@
               </a:defRPr>
             </a:pPr>
             <a:r>
-              <a:rPr sz="2175" b="1">
+              <a:rPr sz="2100" b="1">
                 <a:solidFill>
                   <a:srgbClr val="17253A"/>
                 </a:solidFill>
@@ -8267,28 +8267,30 @@
           <p:cNvPr id="11" name="">
             <a:extLst xmlns:a="http://schemas.openxmlformats.org/drawingml/2006/main">
               <a:ext uri="{FF2B5EF4-FFF2-40B4-BE49-F238E27FC236}">
-                <a16:creationId xmlns:a16="http://schemas.microsoft.com/office/drawing/2014/main" id="{357BDC04-D196-4259-9F30-F14E36BE6862}"/>
-              </a:ext>
-            </a:extLst>
-          </p:cNvPr>
-          <p:cNvSpPr>
-            <a:spLocks xmlns:a="http://schemas.openxmlformats.org/drawingml/2006/main" noGrp="1"/>
-          </p:cNvSpPr>
-          <p:nvPr/>
-        </p:nvSpPr>
-        <p:spPr>
-          <a:xfrm xmlns:a="http://schemas.openxmlformats.org/drawingml/2006/main">
-            <a:off x="1000125" y="2247900"/>
-            <a:ext cx="476250" cy="476250"/>
-          </a:xfrm>
-          <a:prstGeom xmlns:a="http://schemas.openxmlformats.org/drawingml/2006/main" prst="ellipse">
+                <a16:creationId xmlns:a16="http://schemas.microsoft.com/office/drawing/2014/main" id="{A1B0D51C-58DC-4925-8888-1F8763D73769}"/>
+              </a:ext>
+            </a:extLst>
+          </p:cNvPr>
+          <p:cNvSpPr>
+            <a:spLocks xmlns:a="http://schemas.openxmlformats.org/drawingml/2006/main" noGrp="1"/>
+          </p:cNvSpPr>
+          <p:nvPr/>
+        </p:nvSpPr>
+        <p:spPr>
+          <a:xfrm xmlns:a="http://schemas.openxmlformats.org/drawingml/2006/main">
+            <a:off x="971550" y="2124075"/>
+            <a:ext cx="38100" cy="3524250"/>
+          </a:xfrm>
+          <a:prstGeom xmlns:a="http://schemas.openxmlformats.org/drawingml/2006/main" prst="rect">
             <a:avLst/>
           </a:prstGeom>
           <a:solidFill xmlns:a="http://schemas.openxmlformats.org/drawingml/2006/main">
-            <a:srgbClr val="18324A"/>
+            <a:srgbClr val="2C6E73"/>
           </a:solidFill>
           <a:ln xmlns:a="http://schemas.openxmlformats.org/drawingml/2006/main" w="0">
-            <a:noFill/>
+            <a:solidFill>
+              <a:srgbClr val="2C6E73"/>
+            </a:solidFill>
           </a:ln>
         </p:spPr>
       </p:sp>
@@ -8297,19 +8299,19 @@
           <p:cNvPr id="12" name="">
             <a:extLst xmlns:a="http://schemas.openxmlformats.org/drawingml/2006/main">
               <a:ext uri="{FF2B5EF4-FFF2-40B4-BE49-F238E27FC236}">
-                <a16:creationId xmlns:a16="http://schemas.microsoft.com/office/drawing/2014/main" id="{801C81BF-1AA6-4AAF-971A-896774541BBB}"/>
-              </a:ext>
-            </a:extLst>
-          </p:cNvPr>
-          <p:cNvSpPr>
-            <a:spLocks xmlns:a="http://schemas.openxmlformats.org/drawingml/2006/main" noGrp="1"/>
-          </p:cNvSpPr>
-          <p:nvPr/>
-        </p:nvSpPr>
-        <p:spPr>
-          <a:xfrm xmlns:a="http://schemas.openxmlformats.org/drawingml/2006/main">
-            <a:off x="1000125" y="2276475"/>
-            <a:ext cx="476250" cy="419100"/>
+                <a16:creationId xmlns:a16="http://schemas.microsoft.com/office/drawing/2014/main" id="{254EA716-A467-4627-A7AF-0BFD94AEE99B}"/>
+              </a:ext>
+            </a:extLst>
+          </p:cNvPr>
+          <p:cNvSpPr>
+            <a:spLocks xmlns:a="http://schemas.openxmlformats.org/drawingml/2006/main" noGrp="1"/>
+          </p:cNvSpPr>
+          <p:nvPr/>
+        </p:nvSpPr>
+        <p:spPr>
+          <a:xfrm xmlns:a="http://schemas.openxmlformats.org/drawingml/2006/main">
+            <a:off x="1162050" y="2200275"/>
+            <a:ext cx="400050" cy="400050"/>
           </a:xfrm>
           <a:prstGeom xmlns:a="http://schemas.openxmlformats.org/drawingml/2006/main" prst="rect">
             <a:avLst/>
@@ -8326,9 +8328,9 @@
           <a:lstStyle xmlns:a="http://schemas.openxmlformats.org/drawingml/2006/main"/>
           <a:p xmlns:a="http://schemas.openxmlformats.org/drawingml/2006/main">
             <a:pPr algn="ctr">
-              <a:defRPr sz="1350" b="1">
-                <a:solidFill>
-                  <a:srgbClr val="FFFFFF"/>
+              <a:defRPr sz="1125" b="1">
+                <a:solidFill>
+                  <a:srgbClr val="2C6E73"/>
                 </a:solidFill>
                 <a:latin typeface="Arial"/>
                 <a:ea typeface="Arial"/>
@@ -8336,9 +8338,9 @@
               </a:defRPr>
             </a:pPr>
             <a:r>
-              <a:rPr sz="1350" b="1">
-                <a:solidFill>
-                  <a:srgbClr val="FFFFFF"/>
+              <a:rPr sz="1125" b="1">
+                <a:solidFill>
+                  <a:srgbClr val="2C6E73"/>
                 </a:solidFill>
                 <a:latin typeface="Arial"/>
                 <a:ea typeface="Arial"/>
@@ -8354,19 +8356,19 @@
           <p:cNvPr id="13" name="">
             <a:extLst xmlns:a="http://schemas.openxmlformats.org/drawingml/2006/main">
               <a:ext uri="{FF2B5EF4-FFF2-40B4-BE49-F238E27FC236}">
-                <a16:creationId xmlns:a16="http://schemas.microsoft.com/office/drawing/2014/main" id="{4AFE18F5-1312-491B-8D4F-5927CA9DF818}"/>
-              </a:ext>
-            </a:extLst>
-          </p:cNvPr>
-          <p:cNvSpPr>
-            <a:spLocks xmlns:a="http://schemas.openxmlformats.org/drawingml/2006/main" noGrp="1"/>
-          </p:cNvSpPr>
-          <p:nvPr/>
-        </p:nvSpPr>
-        <p:spPr>
-          <a:xfrm xmlns:a="http://schemas.openxmlformats.org/drawingml/2006/main">
-            <a:off x="1714500" y="2181225"/>
-            <a:ext cx="9429750" cy="609600"/>
+                <a16:creationId xmlns:a16="http://schemas.microsoft.com/office/drawing/2014/main" id="{6612FA4B-EA18-499F-8C8B-B7042890CEE4}"/>
+              </a:ext>
+            </a:extLst>
+          </p:cNvPr>
+          <p:cNvSpPr>
+            <a:spLocks xmlns:a="http://schemas.openxmlformats.org/drawingml/2006/main" noGrp="1"/>
+          </p:cNvSpPr>
+          <p:nvPr/>
+        </p:nvSpPr>
+        <p:spPr>
+          <a:xfrm xmlns:a="http://schemas.openxmlformats.org/drawingml/2006/main">
+            <a:off x="1714500" y="2114550"/>
+            <a:ext cx="9525000" cy="638175"/>
           </a:xfrm>
           <a:prstGeom xmlns:a="http://schemas.openxmlformats.org/drawingml/2006/main" prst="rect">
             <a:avLst/>
@@ -8383,7 +8385,7 @@
           <a:lstStyle xmlns:a="http://schemas.openxmlformats.org/drawingml/2006/main"/>
           <a:p xmlns:a="http://schemas.openxmlformats.org/drawingml/2006/main">
             <a:pPr algn="l">
-              <a:defRPr sz="1500" b="0">
+              <a:defRPr sz="1575" b="0">
                 <a:solidFill>
                   <a:srgbClr val="17253A"/>
                 </a:solidFill>
@@ -8393,7 +8395,7 @@
               </a:defRPr>
             </a:pPr>
             <a:r>
-              <a:rPr sz="1500" b="0">
+              <a:rPr sz="1575" b="0">
                 <a:solidFill>
                   <a:srgbClr val="17253A"/>
                 </a:solidFill>
@@ -8401,7 +8403,7 @@
                 <a:ea typeface="Arial"/>
                 <a:cs typeface="Arial"/>
               </a:rPr>
-              <a:t>Identify the structure: Identify what changes and what stays constant.</a:t>
+              <a:t>Rule: 4n - 1</a:t>
             </a:r>
           </a:p>
         </p:txBody>
@@ -8411,28 +8413,30 @@
           <p:cNvPr id="14" name="">
             <a:extLst xmlns:a="http://schemas.openxmlformats.org/drawingml/2006/main">
               <a:ext uri="{FF2B5EF4-FFF2-40B4-BE49-F238E27FC236}">
-                <a16:creationId xmlns:a16="http://schemas.microsoft.com/office/drawing/2014/main" id="{24D7F6B3-2623-4E18-A0FF-BFE371ACB6D4}"/>
-              </a:ext>
-            </a:extLst>
-          </p:cNvPr>
-          <p:cNvSpPr>
-            <a:spLocks xmlns:a="http://schemas.openxmlformats.org/drawingml/2006/main" noGrp="1"/>
-          </p:cNvSpPr>
-          <p:nvPr/>
-        </p:nvSpPr>
-        <p:spPr>
-          <a:xfrm xmlns:a="http://schemas.openxmlformats.org/drawingml/2006/main">
-            <a:off x="1000125" y="2990850"/>
-            <a:ext cx="476250" cy="476250"/>
-          </a:xfrm>
-          <a:prstGeom xmlns:a="http://schemas.openxmlformats.org/drawingml/2006/main" prst="ellipse">
+                <a16:creationId xmlns:a16="http://schemas.microsoft.com/office/drawing/2014/main" id="{83FEF852-BC5E-4F18-A4AF-3C83F022A183}"/>
+              </a:ext>
+            </a:extLst>
+          </p:cNvPr>
+          <p:cNvSpPr>
+            <a:spLocks xmlns:a="http://schemas.openxmlformats.org/drawingml/2006/main" noGrp="1"/>
+          </p:cNvSpPr>
+          <p:nvPr/>
+        </p:nvSpPr>
+        <p:spPr>
+          <a:xfrm xmlns:a="http://schemas.openxmlformats.org/drawingml/2006/main">
+            <a:off x="1714500" y="2771775"/>
+            <a:ext cx="9334500" cy="9525"/>
+          </a:xfrm>
+          <a:prstGeom xmlns:a="http://schemas.openxmlformats.org/drawingml/2006/main" prst="rect">
             <a:avLst/>
           </a:prstGeom>
           <a:solidFill xmlns:a="http://schemas.openxmlformats.org/drawingml/2006/main">
-            <a:srgbClr val="2C6E73"/>
+            <a:srgbClr val="D9E0E6"/>
           </a:solidFill>
           <a:ln xmlns:a="http://schemas.openxmlformats.org/drawingml/2006/main" w="0">
-            <a:noFill/>
+            <a:solidFill>
+              <a:srgbClr val="D9E0E6"/>
+            </a:solidFill>
           </a:ln>
         </p:spPr>
       </p:sp>
@@ -8441,19 +8445,19 @@
           <p:cNvPr id="15" name="">
             <a:extLst xmlns:a="http://schemas.openxmlformats.org/drawingml/2006/main">
               <a:ext uri="{FF2B5EF4-FFF2-40B4-BE49-F238E27FC236}">
-                <a16:creationId xmlns:a16="http://schemas.microsoft.com/office/drawing/2014/main" id="{7DDD63DA-FBC3-483E-9E97-8C5DCB536E2C}"/>
-              </a:ext>
-            </a:extLst>
-          </p:cNvPr>
-          <p:cNvSpPr>
-            <a:spLocks xmlns:a="http://schemas.openxmlformats.org/drawingml/2006/main" noGrp="1"/>
-          </p:cNvSpPr>
-          <p:nvPr/>
-        </p:nvSpPr>
-        <p:spPr>
-          <a:xfrm xmlns:a="http://schemas.openxmlformats.org/drawingml/2006/main">
-            <a:off x="1000125" y="3019425"/>
-            <a:ext cx="476250" cy="419100"/>
+                <a16:creationId xmlns:a16="http://schemas.microsoft.com/office/drawing/2014/main" id="{565C0118-F106-47AE-859C-4459D1CC91E3}"/>
+              </a:ext>
+            </a:extLst>
+          </p:cNvPr>
+          <p:cNvSpPr>
+            <a:spLocks xmlns:a="http://schemas.openxmlformats.org/drawingml/2006/main" noGrp="1"/>
+          </p:cNvSpPr>
+          <p:nvPr/>
+        </p:nvSpPr>
+        <p:spPr>
+          <a:xfrm xmlns:a="http://schemas.openxmlformats.org/drawingml/2006/main">
+            <a:off x="1162050" y="2905125"/>
+            <a:ext cx="400050" cy="400050"/>
           </a:xfrm>
           <a:prstGeom xmlns:a="http://schemas.openxmlformats.org/drawingml/2006/main" prst="rect">
             <a:avLst/>
@@ -8470,9 +8474,9 @@
           <a:lstStyle xmlns:a="http://schemas.openxmlformats.org/drawingml/2006/main"/>
           <a:p xmlns:a="http://schemas.openxmlformats.org/drawingml/2006/main">
             <a:pPr algn="ctr">
-              <a:defRPr sz="1350" b="1">
-                <a:solidFill>
-                  <a:srgbClr val="FFFFFF"/>
+              <a:defRPr sz="1125" b="1">
+                <a:solidFill>
+                  <a:srgbClr val="2C6E73"/>
                 </a:solidFill>
                 <a:latin typeface="Arial"/>
                 <a:ea typeface="Arial"/>
@@ -8480,9 +8484,9 @@
               </a:defRPr>
             </a:pPr>
             <a:r>
-              <a:rPr sz="1350" b="1">
-                <a:solidFill>
-                  <a:srgbClr val="FFFFFF"/>
+              <a:rPr sz="1125" b="1">
+                <a:solidFill>
+                  <a:srgbClr val="2C6E73"/>
                 </a:solidFill>
                 <a:latin typeface="Arial"/>
                 <a:ea typeface="Arial"/>
@@ -8498,19 +8502,19 @@
           <p:cNvPr id="16" name="">
             <a:extLst xmlns:a="http://schemas.openxmlformats.org/drawingml/2006/main">
               <a:ext uri="{FF2B5EF4-FFF2-40B4-BE49-F238E27FC236}">
-                <a16:creationId xmlns:a16="http://schemas.microsoft.com/office/drawing/2014/main" id="{1CF8CF6C-7661-4FC1-B8C8-A612602ED38B}"/>
-              </a:ext>
-            </a:extLst>
-          </p:cNvPr>
-          <p:cNvSpPr>
-            <a:spLocks xmlns:a="http://schemas.openxmlformats.org/drawingml/2006/main" noGrp="1"/>
-          </p:cNvSpPr>
-          <p:nvPr/>
-        </p:nvSpPr>
-        <p:spPr>
-          <a:xfrm xmlns:a="http://schemas.openxmlformats.org/drawingml/2006/main">
-            <a:off x="1714500" y="2924175"/>
-            <a:ext cx="9429750" cy="609600"/>
+                <a16:creationId xmlns:a16="http://schemas.microsoft.com/office/drawing/2014/main" id="{8471A0D0-CC63-4086-A704-27DEA6C2DA0F}"/>
+              </a:ext>
+            </a:extLst>
+          </p:cNvPr>
+          <p:cNvSpPr>
+            <a:spLocks xmlns:a="http://schemas.openxmlformats.org/drawingml/2006/main" noGrp="1"/>
+          </p:cNvSpPr>
+          <p:nvPr/>
+        </p:nvSpPr>
+        <p:spPr>
+          <a:xfrm xmlns:a="http://schemas.openxmlformats.org/drawingml/2006/main">
+            <a:off x="1714500" y="2819400"/>
+            <a:ext cx="9525000" cy="638175"/>
           </a:xfrm>
           <a:prstGeom xmlns:a="http://schemas.openxmlformats.org/drawingml/2006/main" prst="rect">
             <a:avLst/>
@@ -8527,7 +8531,7 @@
           <a:lstStyle xmlns:a="http://schemas.openxmlformats.org/drawingml/2006/main"/>
           <a:p xmlns:a="http://schemas.openxmlformats.org/drawingml/2006/main">
             <a:pPr algn="l">
-              <a:defRPr sz="1500" b="0">
+              <a:defRPr sz="1575" b="0">
                 <a:solidFill>
                   <a:srgbClr val="17253A"/>
                 </a:solidFill>
@@ -8537,7 +8541,7 @@
               </a:defRPr>
             </a:pPr>
             <a:r>
-              <a:rPr sz="1500" b="0">
+              <a:rPr sz="1575" b="0">
                 <a:solidFill>
                   <a:srgbClr val="17253A"/>
                 </a:solidFill>
@@ -8545,7 +8549,7 @@
                 <a:ea typeface="Arial"/>
                 <a:cs typeface="Arial"/>
               </a:rPr>
-              <a:t>Set up the method: Express the relationship with words, a table or a formula.</a:t>
+              <a:t>n=1: 4×1-1=3     n=2: 4×2-1=7</a:t>
             </a:r>
           </a:p>
         </p:txBody>
@@ -8555,28 +8559,30 @@
           <p:cNvPr id="17" name="">
             <a:extLst xmlns:a="http://schemas.openxmlformats.org/drawingml/2006/main">
               <a:ext uri="{FF2B5EF4-FFF2-40B4-BE49-F238E27FC236}">
-                <a16:creationId xmlns:a16="http://schemas.microsoft.com/office/drawing/2014/main" id="{BC4CCF95-6C40-44F9-B4E1-5DF9B263AC0B}"/>
-              </a:ext>
-            </a:extLst>
-          </p:cNvPr>
-          <p:cNvSpPr>
-            <a:spLocks xmlns:a="http://schemas.openxmlformats.org/drawingml/2006/main" noGrp="1"/>
-          </p:cNvSpPr>
-          <p:nvPr/>
-        </p:nvSpPr>
-        <p:spPr>
-          <a:xfrm xmlns:a="http://schemas.openxmlformats.org/drawingml/2006/main">
-            <a:off x="1000125" y="3733800"/>
-            <a:ext cx="476250" cy="476250"/>
-          </a:xfrm>
-          <a:prstGeom xmlns:a="http://schemas.openxmlformats.org/drawingml/2006/main" prst="ellipse">
+                <a16:creationId xmlns:a16="http://schemas.microsoft.com/office/drawing/2014/main" id="{5913DF66-4836-421A-AE33-35F51C318194}"/>
+              </a:ext>
+            </a:extLst>
+          </p:cNvPr>
+          <p:cNvSpPr>
+            <a:spLocks xmlns:a="http://schemas.openxmlformats.org/drawingml/2006/main" noGrp="1"/>
+          </p:cNvSpPr>
+          <p:nvPr/>
+        </p:nvSpPr>
+        <p:spPr>
+          <a:xfrm xmlns:a="http://schemas.openxmlformats.org/drawingml/2006/main">
+            <a:off x="1714500" y="3476625"/>
+            <a:ext cx="9334500" cy="9525"/>
+          </a:xfrm>
+          <a:prstGeom xmlns:a="http://schemas.openxmlformats.org/drawingml/2006/main" prst="rect">
             <a:avLst/>
           </a:prstGeom>
           <a:solidFill xmlns:a="http://schemas.openxmlformats.org/drawingml/2006/main">
-            <a:srgbClr val="2C6E73"/>
+            <a:srgbClr val="D9E0E6"/>
           </a:solidFill>
           <a:ln xmlns:a="http://schemas.openxmlformats.org/drawingml/2006/main" w="0">
-            <a:noFill/>
+            <a:solidFill>
+              <a:srgbClr val="D9E0E6"/>
+            </a:solidFill>
           </a:ln>
         </p:spPr>
       </p:sp>
@@ -8585,19 +8591,19 @@
           <p:cNvPr id="18" name="">
             <a:extLst xmlns:a="http://schemas.openxmlformats.org/drawingml/2006/main">
               <a:ext uri="{FF2B5EF4-FFF2-40B4-BE49-F238E27FC236}">
-                <a16:creationId xmlns:a16="http://schemas.microsoft.com/office/drawing/2014/main" id="{60DD136A-A537-4083-BA07-508EA52BF83C}"/>
-              </a:ext>
-            </a:extLst>
-          </p:cNvPr>
-          <p:cNvSpPr>
-            <a:spLocks xmlns:a="http://schemas.openxmlformats.org/drawingml/2006/main" noGrp="1"/>
-          </p:cNvSpPr>
-          <p:nvPr/>
-        </p:nvSpPr>
-        <p:spPr>
-          <a:xfrm xmlns:a="http://schemas.openxmlformats.org/drawingml/2006/main">
-            <a:off x="1000125" y="3762375"/>
-            <a:ext cx="476250" cy="419100"/>
+                <a16:creationId xmlns:a16="http://schemas.microsoft.com/office/drawing/2014/main" id="{2FF1204E-C9B1-4201-B550-D5E5239D3C2F}"/>
+              </a:ext>
+            </a:extLst>
+          </p:cNvPr>
+          <p:cNvSpPr>
+            <a:spLocks xmlns:a="http://schemas.openxmlformats.org/drawingml/2006/main" noGrp="1"/>
+          </p:cNvSpPr>
+          <p:nvPr/>
+        </p:nvSpPr>
+        <p:spPr>
+          <a:xfrm xmlns:a="http://schemas.openxmlformats.org/drawingml/2006/main">
+            <a:off x="1162050" y="3609975"/>
+            <a:ext cx="400050" cy="400050"/>
           </a:xfrm>
           <a:prstGeom xmlns:a="http://schemas.openxmlformats.org/drawingml/2006/main" prst="rect">
             <a:avLst/>
@@ -8614,9 +8620,9 @@
           <a:lstStyle xmlns:a="http://schemas.openxmlformats.org/drawingml/2006/main"/>
           <a:p xmlns:a="http://schemas.openxmlformats.org/drawingml/2006/main">
             <a:pPr algn="ctr">
-              <a:defRPr sz="1350" b="1">
-                <a:solidFill>
-                  <a:srgbClr val="FFFFFF"/>
+              <a:defRPr sz="1125" b="1">
+                <a:solidFill>
+                  <a:srgbClr val="2C6E73"/>
                 </a:solidFill>
                 <a:latin typeface="Arial"/>
                 <a:ea typeface="Arial"/>
@@ -8624,9 +8630,9 @@
               </a:defRPr>
             </a:pPr>
             <a:r>
-              <a:rPr sz="1350" b="1">
-                <a:solidFill>
-                  <a:srgbClr val="FFFFFF"/>
+              <a:rPr sz="1125" b="1">
+                <a:solidFill>
+                  <a:srgbClr val="2C6E73"/>
                 </a:solidFill>
                 <a:latin typeface="Arial"/>
                 <a:ea typeface="Arial"/>
@@ -8642,19 +8648,19 @@
           <p:cNvPr id="19" name="">
             <a:extLst xmlns:a="http://schemas.openxmlformats.org/drawingml/2006/main">
               <a:ext uri="{FF2B5EF4-FFF2-40B4-BE49-F238E27FC236}">
-                <a16:creationId xmlns:a16="http://schemas.microsoft.com/office/drawing/2014/main" id="{F3373107-2230-4155-AF4E-D1BDA4D27448}"/>
-              </a:ext>
-            </a:extLst>
-          </p:cNvPr>
-          <p:cNvSpPr>
-            <a:spLocks xmlns:a="http://schemas.openxmlformats.org/drawingml/2006/main" noGrp="1"/>
-          </p:cNvSpPr>
-          <p:nvPr/>
-        </p:nvSpPr>
-        <p:spPr>
-          <a:xfrm xmlns:a="http://schemas.openxmlformats.org/drawingml/2006/main">
-            <a:off x="1714500" y="3667125"/>
-            <a:ext cx="9429750" cy="609600"/>
+                <a16:creationId xmlns:a16="http://schemas.microsoft.com/office/drawing/2014/main" id="{D262B5DB-3715-41E2-A2F7-2527261DAF26}"/>
+              </a:ext>
+            </a:extLst>
+          </p:cNvPr>
+          <p:cNvSpPr>
+            <a:spLocks xmlns:a="http://schemas.openxmlformats.org/drawingml/2006/main" noGrp="1"/>
+          </p:cNvSpPr>
+          <p:nvPr/>
+        </p:nvSpPr>
+        <p:spPr>
+          <a:xfrm xmlns:a="http://schemas.openxmlformats.org/drawingml/2006/main">
+            <a:off x="1714500" y="3524250"/>
+            <a:ext cx="9525000" cy="638175"/>
           </a:xfrm>
           <a:prstGeom xmlns:a="http://schemas.openxmlformats.org/drawingml/2006/main" prst="rect">
             <a:avLst/>
@@ -8671,7 +8677,7 @@
           <a:lstStyle xmlns:a="http://schemas.openxmlformats.org/drawingml/2006/main"/>
           <a:p xmlns:a="http://schemas.openxmlformats.org/drawingml/2006/main">
             <a:pPr algn="l">
-              <a:defRPr sz="1500" b="0">
+              <a:defRPr sz="1575" b="0">
                 <a:solidFill>
                   <a:srgbClr val="17253A"/>
                 </a:solidFill>
@@ -8681,7 +8687,7 @@
               </a:defRPr>
             </a:pPr>
             <a:r>
-              <a:rPr sz="1500" b="0">
+              <a:rPr sz="1575" b="0">
                 <a:solidFill>
                   <a:srgbClr val="17253A"/>
                 </a:solidFill>
@@ -8689,7 +8695,7 @@
                 <a:ea typeface="Arial"/>
                 <a:cs typeface="Arial"/>
               </a:rPr>
-              <a:t>Complete the calculation: 3, 7, 11, 15, 19.</a:t>
+              <a:t>n=3: 11     n=4: 15</a:t>
             </a:r>
           </a:p>
         </p:txBody>
@@ -8699,28 +8705,30 @@
           <p:cNvPr id="20" name="">
             <a:extLst xmlns:a="http://schemas.openxmlformats.org/drawingml/2006/main">
               <a:ext uri="{FF2B5EF4-FFF2-40B4-BE49-F238E27FC236}">
-                <a16:creationId xmlns:a16="http://schemas.microsoft.com/office/drawing/2014/main" id="{CE527827-F4AA-4B8B-AED3-D6356BE36A7E}"/>
-              </a:ext>
-            </a:extLst>
-          </p:cNvPr>
-          <p:cNvSpPr>
-            <a:spLocks xmlns:a="http://schemas.openxmlformats.org/drawingml/2006/main" noGrp="1"/>
-          </p:cNvSpPr>
-          <p:nvPr/>
-        </p:nvSpPr>
-        <p:spPr>
-          <a:xfrm xmlns:a="http://schemas.openxmlformats.org/drawingml/2006/main">
-            <a:off x="1000125" y="4476750"/>
-            <a:ext cx="476250" cy="476250"/>
-          </a:xfrm>
-          <a:prstGeom xmlns:a="http://schemas.openxmlformats.org/drawingml/2006/main" prst="ellipse">
+                <a16:creationId xmlns:a16="http://schemas.microsoft.com/office/drawing/2014/main" id="{FF1BD0B1-39D7-4EDA-BA97-240C4BC1482C}"/>
+              </a:ext>
+            </a:extLst>
+          </p:cNvPr>
+          <p:cNvSpPr>
+            <a:spLocks xmlns:a="http://schemas.openxmlformats.org/drawingml/2006/main" noGrp="1"/>
+          </p:cNvSpPr>
+          <p:nvPr/>
+        </p:nvSpPr>
+        <p:spPr>
+          <a:xfrm xmlns:a="http://schemas.openxmlformats.org/drawingml/2006/main">
+            <a:off x="1714500" y="4181475"/>
+            <a:ext cx="9334500" cy="9525"/>
+          </a:xfrm>
+          <a:prstGeom xmlns:a="http://schemas.openxmlformats.org/drawingml/2006/main" prst="rect">
             <a:avLst/>
           </a:prstGeom>
           <a:solidFill xmlns:a="http://schemas.openxmlformats.org/drawingml/2006/main">
-            <a:srgbClr val="2C6E73"/>
+            <a:srgbClr val="D9E0E6"/>
           </a:solidFill>
           <a:ln xmlns:a="http://schemas.openxmlformats.org/drawingml/2006/main" w="0">
-            <a:noFill/>
+            <a:solidFill>
+              <a:srgbClr val="D9E0E6"/>
+            </a:solidFill>
           </a:ln>
         </p:spPr>
       </p:sp>
@@ -8729,19 +8737,19 @@
           <p:cNvPr id="21" name="">
             <a:extLst xmlns:a="http://schemas.openxmlformats.org/drawingml/2006/main">
               <a:ext uri="{FF2B5EF4-FFF2-40B4-BE49-F238E27FC236}">
-                <a16:creationId xmlns:a16="http://schemas.microsoft.com/office/drawing/2014/main" id="{4DA2FF16-E884-439C-9DB0-9026ABF53DE1}"/>
-              </a:ext>
-            </a:extLst>
-          </p:cNvPr>
-          <p:cNvSpPr>
-            <a:spLocks xmlns:a="http://schemas.openxmlformats.org/drawingml/2006/main" noGrp="1"/>
-          </p:cNvSpPr>
-          <p:nvPr/>
-        </p:nvSpPr>
-        <p:spPr>
-          <a:xfrm xmlns:a="http://schemas.openxmlformats.org/drawingml/2006/main">
-            <a:off x="1000125" y="4505325"/>
-            <a:ext cx="476250" cy="419100"/>
+                <a16:creationId xmlns:a16="http://schemas.microsoft.com/office/drawing/2014/main" id="{EAB6F9DC-1746-437B-A90F-034FAE802626}"/>
+              </a:ext>
+            </a:extLst>
+          </p:cNvPr>
+          <p:cNvSpPr>
+            <a:spLocks xmlns:a="http://schemas.openxmlformats.org/drawingml/2006/main" noGrp="1"/>
+          </p:cNvSpPr>
+          <p:nvPr/>
+        </p:nvSpPr>
+        <p:spPr>
+          <a:xfrm xmlns:a="http://schemas.openxmlformats.org/drawingml/2006/main">
+            <a:off x="1162050" y="4314825"/>
+            <a:ext cx="400050" cy="400050"/>
           </a:xfrm>
           <a:prstGeom xmlns:a="http://schemas.openxmlformats.org/drawingml/2006/main" prst="rect">
             <a:avLst/>
@@ -8758,9 +8766,9 @@
           <a:lstStyle xmlns:a="http://schemas.openxmlformats.org/drawingml/2006/main"/>
           <a:p xmlns:a="http://schemas.openxmlformats.org/drawingml/2006/main">
             <a:pPr algn="ctr">
-              <a:defRPr sz="1350" b="1">
-                <a:solidFill>
-                  <a:srgbClr val="FFFFFF"/>
+              <a:defRPr sz="1125" b="1">
+                <a:solidFill>
+                  <a:srgbClr val="2C6E73"/>
                 </a:solidFill>
                 <a:latin typeface="Arial"/>
                 <a:ea typeface="Arial"/>
@@ -8768,9 +8776,9 @@
               </a:defRPr>
             </a:pPr>
             <a:r>
-              <a:rPr sz="1350" b="1">
-                <a:solidFill>
-                  <a:srgbClr val="FFFFFF"/>
+              <a:rPr sz="1125" b="1">
+                <a:solidFill>
+                  <a:srgbClr val="2C6E73"/>
                 </a:solidFill>
                 <a:latin typeface="Arial"/>
                 <a:ea typeface="Arial"/>
@@ -8786,19 +8794,19 @@
           <p:cNvPr id="22" name="">
             <a:extLst xmlns:a="http://schemas.openxmlformats.org/drawingml/2006/main">
               <a:ext uri="{FF2B5EF4-FFF2-40B4-BE49-F238E27FC236}">
-                <a16:creationId xmlns:a16="http://schemas.microsoft.com/office/drawing/2014/main" id="{F0C36718-38DE-445F-BBAD-FEC94BBB6CBF}"/>
-              </a:ext>
-            </a:extLst>
-          </p:cNvPr>
-          <p:cNvSpPr>
-            <a:spLocks xmlns:a="http://schemas.openxmlformats.org/drawingml/2006/main" noGrp="1"/>
-          </p:cNvSpPr>
-          <p:nvPr/>
-        </p:nvSpPr>
-        <p:spPr>
-          <a:xfrm xmlns:a="http://schemas.openxmlformats.org/drawingml/2006/main">
-            <a:off x="1714500" y="4410075"/>
-            <a:ext cx="9429750" cy="609600"/>
+                <a16:creationId xmlns:a16="http://schemas.microsoft.com/office/drawing/2014/main" id="{AF23B716-D8F5-458C-8B4E-058514AEE212}"/>
+              </a:ext>
+            </a:extLst>
+          </p:cNvPr>
+          <p:cNvSpPr>
+            <a:spLocks xmlns:a="http://schemas.openxmlformats.org/drawingml/2006/main" noGrp="1"/>
+          </p:cNvSpPr>
+          <p:nvPr/>
+        </p:nvSpPr>
+        <p:spPr>
+          <a:xfrm xmlns:a="http://schemas.openxmlformats.org/drawingml/2006/main">
+            <a:off x="1714500" y="4229100"/>
+            <a:ext cx="9525000" cy="638175"/>
           </a:xfrm>
           <a:prstGeom xmlns:a="http://schemas.openxmlformats.org/drawingml/2006/main" prst="rect">
             <a:avLst/>
@@ -8815,9 +8823,9 @@
           <a:lstStyle xmlns:a="http://schemas.openxmlformats.org/drawingml/2006/main"/>
           <a:p xmlns:a="http://schemas.openxmlformats.org/drawingml/2006/main">
             <a:pPr algn="l">
-              <a:defRPr sz="1500" b="1">
-                <a:solidFill>
-                  <a:srgbClr val="2F785D"/>
+              <a:defRPr sz="1575" b="0">
+                <a:solidFill>
+                  <a:srgbClr val="17253A"/>
                 </a:solidFill>
                 <a:latin typeface="Arial"/>
                 <a:ea typeface="Arial"/>
@@ -8825,15 +8833,161 @@
               </a:defRPr>
             </a:pPr>
             <a:r>
-              <a:rPr sz="1500" b="1">
+              <a:rPr sz="1575" b="0">
+                <a:solidFill>
+                  <a:srgbClr val="17253A"/>
+                </a:solidFill>
+                <a:latin typeface="Arial"/>
+                <a:ea typeface="Arial"/>
+                <a:cs typeface="Arial"/>
+              </a:rPr>
+              <a:t>n=5: 19</a:t>
+            </a:r>
+          </a:p>
+        </p:txBody>
+      </p:sp>
+      <p:sp>
+        <p:nvSpPr>
+          <p:cNvPr id="23" name="">
+            <a:extLst xmlns:a="http://schemas.openxmlformats.org/drawingml/2006/main">
+              <a:ext uri="{FF2B5EF4-FFF2-40B4-BE49-F238E27FC236}">
+                <a16:creationId xmlns:a16="http://schemas.microsoft.com/office/drawing/2014/main" id="{BC850B0C-7678-4B83-AF13-53C2207C1485}"/>
+              </a:ext>
+            </a:extLst>
+          </p:cNvPr>
+          <p:cNvSpPr>
+            <a:spLocks xmlns:a="http://schemas.openxmlformats.org/drawingml/2006/main" noGrp="1"/>
+          </p:cNvSpPr>
+          <p:nvPr/>
+        </p:nvSpPr>
+        <p:spPr>
+          <a:xfrm xmlns:a="http://schemas.openxmlformats.org/drawingml/2006/main">
+            <a:off x="1714500" y="4886325"/>
+            <a:ext cx="9334500" cy="9525"/>
+          </a:xfrm>
+          <a:prstGeom xmlns:a="http://schemas.openxmlformats.org/drawingml/2006/main" prst="rect">
+            <a:avLst/>
+          </a:prstGeom>
+          <a:solidFill xmlns:a="http://schemas.openxmlformats.org/drawingml/2006/main">
+            <a:srgbClr val="D9E0E6"/>
+          </a:solidFill>
+          <a:ln xmlns:a="http://schemas.openxmlformats.org/drawingml/2006/main" w="0">
+            <a:solidFill>
+              <a:srgbClr val="D9E0E6"/>
+            </a:solidFill>
+          </a:ln>
+        </p:spPr>
+      </p:sp>
+      <p:sp>
+        <p:nvSpPr>
+          <p:cNvPr id="24" name="">
+            <a:extLst xmlns:a="http://schemas.openxmlformats.org/drawingml/2006/main">
+              <a:ext uri="{FF2B5EF4-FFF2-40B4-BE49-F238E27FC236}">
+                <a16:creationId xmlns:a16="http://schemas.microsoft.com/office/drawing/2014/main" id="{56202206-D57D-48B0-8271-DA1264353F12}"/>
+              </a:ext>
+            </a:extLst>
+          </p:cNvPr>
+          <p:cNvSpPr>
+            <a:spLocks xmlns:a="http://schemas.openxmlformats.org/drawingml/2006/main" noGrp="1"/>
+          </p:cNvSpPr>
+          <p:nvPr/>
+        </p:nvSpPr>
+        <p:spPr>
+          <a:xfrm xmlns:a="http://schemas.openxmlformats.org/drawingml/2006/main">
+            <a:off x="1162050" y="5019675"/>
+            <a:ext cx="400050" cy="400050"/>
+          </a:xfrm>
+          <a:prstGeom xmlns:a="http://schemas.openxmlformats.org/drawingml/2006/main" prst="rect">
+            <a:avLst/>
+          </a:prstGeom>
+          <a:noFill xmlns:a="http://schemas.openxmlformats.org/drawingml/2006/main"/>
+          <a:ln xmlns:a="http://schemas.openxmlformats.org/drawingml/2006/main" w="0">
+            <a:noFill/>
+          </a:ln>
+        </p:spPr>
+        <p:txBody>
+          <a:bodyPr xmlns:a="http://schemas.openxmlformats.org/drawingml/2006/main" anchor="ctr">
+            <a:normAutofit fontScale="100000"/>
+          </a:bodyPr>
+          <a:lstStyle xmlns:a="http://schemas.openxmlformats.org/drawingml/2006/main"/>
+          <a:p xmlns:a="http://schemas.openxmlformats.org/drawingml/2006/main">
+            <a:pPr algn="ctr">
+              <a:defRPr sz="1125" b="1">
                 <a:solidFill>
                   <a:srgbClr val="2F785D"/>
                 </a:solidFill>
                 <a:latin typeface="Arial"/>
                 <a:ea typeface="Arial"/>
                 <a:cs typeface="Arial"/>
+              </a:defRPr>
+            </a:pPr>
+            <a:r>
+              <a:rPr sz="1125" b="1">
+                <a:solidFill>
+                  <a:srgbClr val="2F785D"/>
+                </a:solidFill>
+                <a:latin typeface="Arial"/>
+                <a:ea typeface="Arial"/>
+                <a:cs typeface="Arial"/>
               </a:rPr>
-              <a:t>Check the result: Substitute carefully and check against known terms.</a:t>
+              <a:t>5</a:t>
+            </a:r>
+          </a:p>
+        </p:txBody>
+      </p:sp>
+      <p:sp>
+        <p:nvSpPr>
+          <p:cNvPr id="25" name="">
+            <a:extLst xmlns:a="http://schemas.openxmlformats.org/drawingml/2006/main">
+              <a:ext uri="{FF2B5EF4-FFF2-40B4-BE49-F238E27FC236}">
+                <a16:creationId xmlns:a16="http://schemas.microsoft.com/office/drawing/2014/main" id="{8964676C-E0DD-4C0E-9FED-6F19D328E77B}"/>
+              </a:ext>
+            </a:extLst>
+          </p:cNvPr>
+          <p:cNvSpPr>
+            <a:spLocks xmlns:a="http://schemas.openxmlformats.org/drawingml/2006/main" noGrp="1"/>
+          </p:cNvSpPr>
+          <p:nvPr/>
+        </p:nvSpPr>
+        <p:spPr>
+          <a:xfrm xmlns:a="http://schemas.openxmlformats.org/drawingml/2006/main">
+            <a:off x="1714500" y="4933950"/>
+            <a:ext cx="9525000" cy="638175"/>
+          </a:xfrm>
+          <a:prstGeom xmlns:a="http://schemas.openxmlformats.org/drawingml/2006/main" prst="rect">
+            <a:avLst/>
+          </a:prstGeom>
+          <a:noFill xmlns:a="http://schemas.openxmlformats.org/drawingml/2006/main"/>
+          <a:ln xmlns:a="http://schemas.openxmlformats.org/drawingml/2006/main" w="0">
+            <a:noFill/>
+          </a:ln>
+        </p:spPr>
+        <p:txBody>
+          <a:bodyPr xmlns:a="http://schemas.openxmlformats.org/drawingml/2006/main" anchor="ctr">
+            <a:normAutofit fontScale="100000"/>
+          </a:bodyPr>
+          <a:lstStyle xmlns:a="http://schemas.openxmlformats.org/drawingml/2006/main"/>
+          <a:p xmlns:a="http://schemas.openxmlformats.org/drawingml/2006/main">
+            <a:pPr algn="l">
+              <a:defRPr sz="1575" b="1">
+                <a:solidFill>
+                  <a:srgbClr val="2F785D"/>
+                </a:solidFill>
+                <a:latin typeface="Arial"/>
+                <a:ea typeface="Arial"/>
+                <a:cs typeface="Arial"/>
+              </a:defRPr>
+            </a:pPr>
+            <a:r>
+              <a:rPr sz="1575" b="1">
+                <a:solidFill>
+                  <a:srgbClr val="2F785D"/>
+                </a:solidFill>
+                <a:latin typeface="Arial"/>
+                <a:ea typeface="Arial"/>
+                <a:cs typeface="Arial"/>
+              </a:rPr>
+              <a:t>First five terms: 3, 7, 11, 15, 19</a:t>
             </a:r>
           </a:p>
         </p:txBody>
@@ -8841,7 +8995,7 @@
     </p:spTree>
     <p:extLst>
       <p:ext uri="{BB962C8B-B14F-4D97-AF65-F5344CB8AC3E}">
-        <p14:creationId xmlns:p14="http://schemas.microsoft.com/office/powerpoint/2010/main" val="2050882595"/>
+        <p14:creationId xmlns:p14="http://schemas.microsoft.com/office/powerpoint/2010/main" val="338950893"/>
       </p:ext>
     </p:extLst>
   </p:cSld>
@@ -9078,6 +9232,51 @@
                       </p:childTnLst>
                     </p:cTn>
                   </p:par>
+                  <p:par>
+                    <p:cTn id="23" fill="hold">
+                      <p:stCondLst>
+                        <p:cond delay="indefinite"/>
+                      </p:stCondLst>
+                      <p:childTnLst>
+                        <p:par>
+                          <p:cTn id="24" fill="hold">
+                            <p:stCondLst>
+                              <p:cond delay="0"/>
+                            </p:stCondLst>
+                            <p:childTnLst>
+                              <p:par>
+                                <p:cTn id="25" presetID="1" presetClass="entr" presetSubtype="0" fill="hold" grpId="0" nodeType="clickEffect">
+                                  <p:stCondLst>
+                                    <p:cond delay="0"/>
+                                  </p:stCondLst>
+                                  <p:childTnLst>
+                                    <p:set>
+                                      <p:cBhvr>
+                                        <p:cTn id="26" dur="1" fill="hold">
+                                          <p:stCondLst>
+                                            <p:cond delay="0"/>
+                                          </p:stCondLst>
+                                        </p:cTn>
+                                        <p:tgtEl>
+                                          <p:spTgt spid="25"/>
+                                        </p:tgtEl>
+                                        <p:attrNameLst>
+                                          <p:attrName>style.visibility</p:attrName>
+                                        </p:attrNameLst>
+                                      </p:cBhvr>
+                                      <p:to>
+                                        <p:strVal val="visible"/>
+                                      </p:to>
+                                    </p:set>
+                                  </p:childTnLst>
+                                </p:cTn>
+                              </p:par>
+                            </p:childTnLst>
+                          </p:cTn>
+                        </p:par>
+                      </p:childTnLst>
+                    </p:cTn>
+                  </p:par>
                 </p:childTnLst>
               </p:cTn>
               <p:prevCondLst>
@@ -9105,6 +9304,7 @@
       <p:bldP spid="16" grpId="0"/>
       <p:bldP spid="19" grpId="0"/>
       <p:bldP spid="22" grpId="0"/>
+      <p:bldP spid="25" grpId="0"/>
     </p:bldLst>
   </p:timing>
 </p:sld>
@@ -9134,7 +9334,7 @@
           <p:cNvPr id="15" name="">
             <a:extLst xmlns:a="http://schemas.openxmlformats.org/drawingml/2006/main">
               <a:ext uri="{FF2B5EF4-FFF2-40B4-BE49-F238E27FC236}">
-                <a16:creationId xmlns:a16="http://schemas.microsoft.com/office/drawing/2014/main" id="{BD3BDA8C-1C12-4312-9C8A-F99DCDDC987D}"/>
+                <a16:creationId xmlns:a16="http://schemas.microsoft.com/office/drawing/2014/main" id="{44721420-8477-4550-BC07-815538B62F67}"/>
               </a:ext>
             </a:extLst>
           </p:cNvPr>
@@ -9166,7 +9366,7 @@
           <p:cNvPr id="2" name="">
             <a:extLst xmlns:a="http://schemas.openxmlformats.org/drawingml/2006/main">
               <a:ext uri="{FF2B5EF4-FFF2-40B4-BE49-F238E27FC236}">
-                <a16:creationId xmlns:a16="http://schemas.microsoft.com/office/drawing/2014/main" id="{CB362A9C-36E3-4788-8E22-46081CA44064}"/>
+                <a16:creationId xmlns:a16="http://schemas.microsoft.com/office/drawing/2014/main" id="{259DF67D-9E16-4FDC-A08B-BACD4EF53081}"/>
               </a:ext>
             </a:extLst>
           </p:cNvPr>
@@ -9223,7 +9423,7 @@
           <p:cNvPr id="3" name="">
             <a:extLst xmlns:a="http://schemas.openxmlformats.org/drawingml/2006/main">
               <a:ext uri="{FF2B5EF4-FFF2-40B4-BE49-F238E27FC236}">
-                <a16:creationId xmlns:a16="http://schemas.microsoft.com/office/drawing/2014/main" id="{85A3AA8E-BF79-4682-8596-9F97751475F9}"/>
+                <a16:creationId xmlns:a16="http://schemas.microsoft.com/office/drawing/2014/main" id="{B97ED3C6-15B1-4710-B045-689830F5A3CF}"/>
               </a:ext>
             </a:extLst>
           </p:cNvPr>
@@ -9255,7 +9455,7 @@
           <p:cNvPr id="4" name="">
             <a:extLst xmlns:a="http://schemas.openxmlformats.org/drawingml/2006/main">
               <a:ext uri="{FF2B5EF4-FFF2-40B4-BE49-F238E27FC236}">
-                <a16:creationId xmlns:a16="http://schemas.microsoft.com/office/drawing/2014/main" id="{47419B4C-9004-44A8-8AA4-5A5D0CF7CE9E}"/>
+                <a16:creationId xmlns:a16="http://schemas.microsoft.com/office/drawing/2014/main" id="{F1EC6FAC-F321-4187-A0C4-D9145E85FF7B}"/>
               </a:ext>
             </a:extLst>
           </p:cNvPr>
@@ -9312,7 +9512,7 @@
           <p:cNvPr id="5" name="">
             <a:extLst xmlns:a="http://schemas.openxmlformats.org/drawingml/2006/main">
               <a:ext uri="{FF2B5EF4-FFF2-40B4-BE49-F238E27FC236}">
-                <a16:creationId xmlns:a16="http://schemas.microsoft.com/office/drawing/2014/main" id="{820D16B2-D470-47E4-A0CB-CB4A90193AF8}"/>
+                <a16:creationId xmlns:a16="http://schemas.microsoft.com/office/drawing/2014/main" id="{3FF9D60C-5823-40F8-8474-F930D51BE464}"/>
               </a:ext>
             </a:extLst>
           </p:cNvPr>
@@ -9369,7 +9569,7 @@
           <p:cNvPr id="6" name="">
             <a:extLst xmlns:a="http://schemas.openxmlformats.org/drawingml/2006/main">
               <a:ext uri="{FF2B5EF4-FFF2-40B4-BE49-F238E27FC236}">
-                <a16:creationId xmlns:a16="http://schemas.microsoft.com/office/drawing/2014/main" id="{A03C50AF-5B2B-4C09-B302-9ED2C217F794}"/>
+                <a16:creationId xmlns:a16="http://schemas.microsoft.com/office/drawing/2014/main" id="{EAAC575A-767D-4FF2-AFBD-C812526D4F15}"/>
               </a:ext>
             </a:extLst>
           </p:cNvPr>
@@ -9426,7 +9626,7 @@
           <p:cNvPr id="7" name="">
             <a:extLst xmlns:a="http://schemas.openxmlformats.org/drawingml/2006/main">
               <a:ext uri="{FF2B5EF4-FFF2-40B4-BE49-F238E27FC236}">
-                <a16:creationId xmlns:a16="http://schemas.microsoft.com/office/drawing/2014/main" id="{CA42419A-B668-4993-84DA-BE9F8B22D50E}"/>
+                <a16:creationId xmlns:a16="http://schemas.microsoft.com/office/drawing/2014/main" id="{8F292661-C466-4426-B4CD-D00EB6B82F31}"/>
               </a:ext>
             </a:extLst>
           </p:cNvPr>
@@ -9458,7 +9658,7 @@
           <p:cNvPr id="8" name="">
             <a:extLst xmlns:a="http://schemas.openxmlformats.org/drawingml/2006/main">
               <a:ext uri="{FF2B5EF4-FFF2-40B4-BE49-F238E27FC236}">
-                <a16:creationId xmlns:a16="http://schemas.microsoft.com/office/drawing/2014/main" id="{31605EFA-FBEB-4865-B79A-8700B13716F4}"/>
+                <a16:creationId xmlns:a16="http://schemas.microsoft.com/office/drawing/2014/main" id="{E80F048E-E47E-4F34-A154-A4A694A67D14}"/>
               </a:ext>
             </a:extLst>
           </p:cNvPr>
@@ -9515,7 +9715,7 @@
           <p:cNvPr id="9" name="">
             <a:extLst xmlns:a="http://schemas.openxmlformats.org/drawingml/2006/main">
               <a:ext uri="{FF2B5EF4-FFF2-40B4-BE49-F238E27FC236}">
-                <a16:creationId xmlns:a16="http://schemas.microsoft.com/office/drawing/2014/main" id="{67BBBE13-1861-41C4-8F76-BB83FE3D62E6}"/>
+                <a16:creationId xmlns:a16="http://schemas.microsoft.com/office/drawing/2014/main" id="{31B07189-A129-4B12-AE58-3D6A5117763B}"/>
               </a:ext>
             </a:extLst>
           </p:cNvPr>
@@ -9572,7 +9772,7 @@
           <p:cNvPr id="10" name="">
             <a:extLst xmlns:a="http://schemas.openxmlformats.org/drawingml/2006/main">
               <a:ext uri="{FF2B5EF4-FFF2-40B4-BE49-F238E27FC236}">
-                <a16:creationId xmlns:a16="http://schemas.microsoft.com/office/drawing/2014/main" id="{42CE7594-7916-4E33-B6B0-118A716357D4}"/>
+                <a16:creationId xmlns:a16="http://schemas.microsoft.com/office/drawing/2014/main" id="{72E40603-A111-4BB7-A419-81D2C1D70D55}"/>
               </a:ext>
             </a:extLst>
           </p:cNvPr>
@@ -9629,7 +9829,7 @@
           <p:cNvPr id="11" name="">
             <a:extLst xmlns:a="http://schemas.openxmlformats.org/drawingml/2006/main">
               <a:ext uri="{FF2B5EF4-FFF2-40B4-BE49-F238E27FC236}">
-                <a16:creationId xmlns:a16="http://schemas.microsoft.com/office/drawing/2014/main" id="{14E699FF-1427-4C9A-A35B-78CD91073851}"/>
+                <a16:creationId xmlns:a16="http://schemas.microsoft.com/office/drawing/2014/main" id="{1046F18D-7122-4449-9B01-94A80C2FF1F3}"/>
               </a:ext>
             </a:extLst>
           </p:cNvPr>
@@ -9686,7 +9886,7 @@
           <p:cNvPr id="12" name="">
             <a:extLst xmlns:a="http://schemas.openxmlformats.org/drawingml/2006/main">
               <a:ext uri="{FF2B5EF4-FFF2-40B4-BE49-F238E27FC236}">
-                <a16:creationId xmlns:a16="http://schemas.microsoft.com/office/drawing/2014/main" id="{501B5E7F-B9A9-441C-8540-6874A091338B}"/>
+                <a16:creationId xmlns:a16="http://schemas.microsoft.com/office/drawing/2014/main" id="{689310EE-45D8-407A-8277-DA30B40438E5}"/>
               </a:ext>
             </a:extLst>
           </p:cNvPr>
@@ -9718,7 +9918,7 @@
           <p:cNvPr id="13" name="">
             <a:extLst xmlns:a="http://schemas.openxmlformats.org/drawingml/2006/main">
               <a:ext uri="{FF2B5EF4-FFF2-40B4-BE49-F238E27FC236}">
-                <a16:creationId xmlns:a16="http://schemas.microsoft.com/office/drawing/2014/main" id="{C6960884-A414-4711-B6A7-42E42B870390}"/>
+                <a16:creationId xmlns:a16="http://schemas.microsoft.com/office/drawing/2014/main" id="{D652F5FD-AD3B-4CD4-9431-D3E6C1818777}"/>
               </a:ext>
             </a:extLst>
           </p:cNvPr>
@@ -9775,7 +9975,7 @@
           <p:cNvPr id="14" name="">
             <a:extLst xmlns:a="http://schemas.openxmlformats.org/drawingml/2006/main">
               <a:ext uri="{FF2B5EF4-FFF2-40B4-BE49-F238E27FC236}">
-                <a16:creationId xmlns:a16="http://schemas.microsoft.com/office/drawing/2014/main" id="{C4E24134-AF44-44D4-AAAF-15F0F6434066}"/>
+                <a16:creationId xmlns:a16="http://schemas.microsoft.com/office/drawing/2014/main" id="{32E92540-4011-47B4-BE3D-100D7FDED195}"/>
               </a:ext>
             </a:extLst>
           </p:cNvPr>
@@ -9830,7 +10030,7 @@
     </p:spTree>
     <p:extLst>
       <p:ext uri="{BB962C8B-B14F-4D97-AF65-F5344CB8AC3E}">
-        <p14:creationId xmlns:p14="http://schemas.microsoft.com/office/powerpoint/2010/main" val="925111908"/>
+        <p14:creationId xmlns:p14="http://schemas.microsoft.com/office/powerpoint/2010/main" val="7070807"/>
       </p:ext>
     </p:extLst>
   </p:cSld>
@@ -10031,7 +10231,7 @@
           <p:cNvPr id="16" name="">
             <a:extLst xmlns:a="http://schemas.openxmlformats.org/drawingml/2006/main">
               <a:ext uri="{FF2B5EF4-FFF2-40B4-BE49-F238E27FC236}">
-                <a16:creationId xmlns:a16="http://schemas.microsoft.com/office/drawing/2014/main" id="{9F0E8247-9FE2-4ACB-B4A8-270EDF3AD77B}"/>
+                <a16:creationId xmlns:a16="http://schemas.microsoft.com/office/drawing/2014/main" id="{09F7C22D-E06B-477B-A170-E3FEAEDA9F03}"/>
               </a:ext>
             </a:extLst>
           </p:cNvPr>
@@ -10063,7 +10263,7 @@
           <p:cNvPr id="2" name="">
             <a:extLst xmlns:a="http://schemas.openxmlformats.org/drawingml/2006/main">
               <a:ext uri="{FF2B5EF4-FFF2-40B4-BE49-F238E27FC236}">
-                <a16:creationId xmlns:a16="http://schemas.microsoft.com/office/drawing/2014/main" id="{66F3E155-A6E1-4C1E-9EAE-251841FC368F}"/>
+                <a16:creationId xmlns:a16="http://schemas.microsoft.com/office/drawing/2014/main" id="{E316C0F0-9648-4105-917F-5C9D7809CDCE}"/>
               </a:ext>
             </a:extLst>
           </p:cNvPr>
@@ -10120,7 +10320,7 @@
           <p:cNvPr id="3" name="">
             <a:extLst xmlns:a="http://schemas.openxmlformats.org/drawingml/2006/main">
               <a:ext uri="{FF2B5EF4-FFF2-40B4-BE49-F238E27FC236}">
-                <a16:creationId xmlns:a16="http://schemas.microsoft.com/office/drawing/2014/main" id="{3FE0F948-B098-4695-B125-0C6AC6517DF1}"/>
+                <a16:creationId xmlns:a16="http://schemas.microsoft.com/office/drawing/2014/main" id="{A20D48C9-3A9A-42F6-81ED-9B4A2916A9C6}"/>
               </a:ext>
             </a:extLst>
           </p:cNvPr>
@@ -10152,7 +10352,7 @@
           <p:cNvPr id="4" name="">
             <a:extLst xmlns:a="http://schemas.openxmlformats.org/drawingml/2006/main">
               <a:ext uri="{FF2B5EF4-FFF2-40B4-BE49-F238E27FC236}">
-                <a16:creationId xmlns:a16="http://schemas.microsoft.com/office/drawing/2014/main" id="{E439BE45-87ED-4BD9-AFEE-3CCDF6AFC9BC}"/>
+                <a16:creationId xmlns:a16="http://schemas.microsoft.com/office/drawing/2014/main" id="{D5DB5B3C-B086-4F4D-BFE2-8730CD93CC70}"/>
               </a:ext>
             </a:extLst>
           </p:cNvPr>
@@ -10209,7 +10409,7 @@
           <p:cNvPr id="5" name="">
             <a:extLst xmlns:a="http://schemas.openxmlformats.org/drawingml/2006/main">
               <a:ext uri="{FF2B5EF4-FFF2-40B4-BE49-F238E27FC236}">
-                <a16:creationId xmlns:a16="http://schemas.microsoft.com/office/drawing/2014/main" id="{6AE58FB7-FD62-49BD-BBAC-1EC354CBFCF9}"/>
+                <a16:creationId xmlns:a16="http://schemas.microsoft.com/office/drawing/2014/main" id="{61D5B994-EC3B-4952-ACB9-BC32160DE5A5}"/>
               </a:ext>
             </a:extLst>
           </p:cNvPr>
@@ -10266,7 +10466,7 @@
           <p:cNvPr id="6" name="">
             <a:extLst xmlns:a="http://schemas.openxmlformats.org/drawingml/2006/main">
               <a:ext uri="{FF2B5EF4-FFF2-40B4-BE49-F238E27FC236}">
-                <a16:creationId xmlns:a16="http://schemas.microsoft.com/office/drawing/2014/main" id="{91112DA4-C6F0-465A-B3D6-C89B2E7FEB58}"/>
+                <a16:creationId xmlns:a16="http://schemas.microsoft.com/office/drawing/2014/main" id="{E415363E-DB2F-4AFD-BE8B-4E48295DCDED}"/>
               </a:ext>
             </a:extLst>
           </p:cNvPr>
@@ -10323,7 +10523,7 @@
           <p:cNvPr id="7" name="">
             <a:extLst xmlns:a="http://schemas.openxmlformats.org/drawingml/2006/main">
               <a:ext uri="{FF2B5EF4-FFF2-40B4-BE49-F238E27FC236}">
-                <a16:creationId xmlns:a16="http://schemas.microsoft.com/office/drawing/2014/main" id="{D6FF08A1-1ABC-4EFD-98C1-C4BFE1B80074}"/>
+                <a16:creationId xmlns:a16="http://schemas.microsoft.com/office/drawing/2014/main" id="{77EAB5CC-A953-4A47-A95C-434FBDEF48E0}"/>
               </a:ext>
             </a:extLst>
           </p:cNvPr>
@@ -10355,7 +10555,7 @@
           <p:cNvPr id="8" name="">
             <a:extLst xmlns:a="http://schemas.openxmlformats.org/drawingml/2006/main">
               <a:ext uri="{FF2B5EF4-FFF2-40B4-BE49-F238E27FC236}">
-                <a16:creationId xmlns:a16="http://schemas.microsoft.com/office/drawing/2014/main" id="{AAD06B03-E914-4308-8BCE-810F6DA5F4AB}"/>
+                <a16:creationId xmlns:a16="http://schemas.microsoft.com/office/drawing/2014/main" id="{8BBFAC7F-F5D2-4D74-9F29-030649DDDD1A}"/>
               </a:ext>
             </a:extLst>
           </p:cNvPr>
@@ -10412,7 +10612,7 @@
           <p:cNvPr id="9" name="">
             <a:extLst xmlns:a="http://schemas.openxmlformats.org/drawingml/2006/main">
               <a:ext uri="{FF2B5EF4-FFF2-40B4-BE49-F238E27FC236}">
-                <a16:creationId xmlns:a16="http://schemas.microsoft.com/office/drawing/2014/main" id="{76F967B1-FD57-4268-BA1F-49256BEE3F6E}"/>
+                <a16:creationId xmlns:a16="http://schemas.microsoft.com/office/drawing/2014/main" id="{3F7052B0-6BDE-40D0-9275-94510561BE1B}"/>
               </a:ext>
             </a:extLst>
           </p:cNvPr>
@@ -10469,7 +10669,7 @@
           <p:cNvPr id="10" name="">
             <a:extLst xmlns:a="http://schemas.openxmlformats.org/drawingml/2006/main">
               <a:ext uri="{FF2B5EF4-FFF2-40B4-BE49-F238E27FC236}">
-                <a16:creationId xmlns:a16="http://schemas.microsoft.com/office/drawing/2014/main" id="{EA904DE4-F62F-4332-A647-A3B95F01B1F4}"/>
+                <a16:creationId xmlns:a16="http://schemas.microsoft.com/office/drawing/2014/main" id="{C5BEEDF4-0269-4DC5-B4A1-8C574DB407F4}"/>
               </a:ext>
             </a:extLst>
           </p:cNvPr>
@@ -10526,7 +10726,7 @@
           <p:cNvPr id="11" name="">
             <a:extLst xmlns:a="http://schemas.openxmlformats.org/drawingml/2006/main">
               <a:ext uri="{FF2B5EF4-FFF2-40B4-BE49-F238E27FC236}">
-                <a16:creationId xmlns:a16="http://schemas.microsoft.com/office/drawing/2014/main" id="{778CD6BE-567E-4806-8780-8A2F10F6EFED}"/>
+                <a16:creationId xmlns:a16="http://schemas.microsoft.com/office/drawing/2014/main" id="{A99E739F-B71D-4024-9441-3AAD63A34A35}"/>
               </a:ext>
             </a:extLst>
           </p:cNvPr>
@@ -10583,7 +10783,7 @@
           <p:cNvPr id="12" name="">
             <a:extLst xmlns:a="http://schemas.openxmlformats.org/drawingml/2006/main">
               <a:ext uri="{FF2B5EF4-FFF2-40B4-BE49-F238E27FC236}">
-                <a16:creationId xmlns:a16="http://schemas.microsoft.com/office/drawing/2014/main" id="{E100FA03-A78A-44CA-A42F-51047C8788A8}"/>
+                <a16:creationId xmlns:a16="http://schemas.microsoft.com/office/drawing/2014/main" id="{65074744-5DC0-4EB2-93DE-CB0472F60576}"/>
               </a:ext>
             </a:extLst>
           </p:cNvPr>
@@ -10640,7 +10840,7 @@
           <p:cNvPr id="13" name="">
             <a:extLst xmlns:a="http://schemas.openxmlformats.org/drawingml/2006/main">
               <a:ext uri="{FF2B5EF4-FFF2-40B4-BE49-F238E27FC236}">
-                <a16:creationId xmlns:a16="http://schemas.microsoft.com/office/drawing/2014/main" id="{86767C04-68CF-457D-A874-A47098CA9CB3}"/>
+                <a16:creationId xmlns:a16="http://schemas.microsoft.com/office/drawing/2014/main" id="{EBC0F163-E8DA-4A8B-ABAA-A31A7E2BD303}"/>
               </a:ext>
             </a:extLst>
           </p:cNvPr>
@@ -10697,7 +10897,7 @@
           <p:cNvPr id="14" name="">
             <a:extLst xmlns:a="http://schemas.openxmlformats.org/drawingml/2006/main">
               <a:ext uri="{FF2B5EF4-FFF2-40B4-BE49-F238E27FC236}">
-                <a16:creationId xmlns:a16="http://schemas.microsoft.com/office/drawing/2014/main" id="{6D4D68EB-23C2-42B6-B414-81FA7F981A6C}"/>
+                <a16:creationId xmlns:a16="http://schemas.microsoft.com/office/drawing/2014/main" id="{D06AE7D9-D416-434C-A3D0-CEDEA73789EA}"/>
               </a:ext>
             </a:extLst>
           </p:cNvPr>
@@ -10754,7 +10954,7 @@
           <p:cNvPr id="15" name="">
             <a:extLst xmlns:a="http://schemas.openxmlformats.org/drawingml/2006/main">
               <a:ext uri="{FF2B5EF4-FFF2-40B4-BE49-F238E27FC236}">
-                <a16:creationId xmlns:a16="http://schemas.microsoft.com/office/drawing/2014/main" id="{4F8AB18E-6427-4632-A4BC-478AA4F74932}"/>
+                <a16:creationId xmlns:a16="http://schemas.microsoft.com/office/drawing/2014/main" id="{D7942D9F-BFFB-4BBF-A012-B08A7E0812B0}"/>
               </a:ext>
             </a:extLst>
           </p:cNvPr>
@@ -10809,7 +11009,7 @@
     </p:spTree>
     <p:extLst>
       <p:ext uri="{BB962C8B-B14F-4D97-AF65-F5344CB8AC3E}">
-        <p14:creationId xmlns:p14="http://schemas.microsoft.com/office/powerpoint/2010/main" val="185302412"/>
+        <p14:creationId xmlns:p14="http://schemas.microsoft.com/office/powerpoint/2010/main" val="424363033"/>
       </p:ext>
     </p:extLst>
   </p:cSld>
@@ -10964,7 +11164,7 @@
           <p:cNvPr id="16" name="">
             <a:extLst xmlns:a="http://schemas.openxmlformats.org/drawingml/2006/main">
               <a:ext uri="{FF2B5EF4-FFF2-40B4-BE49-F238E27FC236}">
-                <a16:creationId xmlns:a16="http://schemas.microsoft.com/office/drawing/2014/main" id="{919058A5-4B22-47FD-A156-7901775B4F35}"/>
+                <a16:creationId xmlns:a16="http://schemas.microsoft.com/office/drawing/2014/main" id="{36905632-B10E-4E26-9E22-4ACAC91FB703}"/>
               </a:ext>
             </a:extLst>
           </p:cNvPr>
@@ -10996,7 +11196,7 @@
           <p:cNvPr id="2" name="">
             <a:extLst xmlns:a="http://schemas.openxmlformats.org/drawingml/2006/main">
               <a:ext uri="{FF2B5EF4-FFF2-40B4-BE49-F238E27FC236}">
-                <a16:creationId xmlns:a16="http://schemas.microsoft.com/office/drawing/2014/main" id="{DE384257-7CE6-444A-AE4C-808061925998}"/>
+                <a16:creationId xmlns:a16="http://schemas.microsoft.com/office/drawing/2014/main" id="{22C6B4EE-AD2A-4763-B7A4-7CBE7915E3E2}"/>
               </a:ext>
             </a:extLst>
           </p:cNvPr>
@@ -11053,7 +11253,7 @@
           <p:cNvPr id="3" name="">
             <a:extLst xmlns:a="http://schemas.openxmlformats.org/drawingml/2006/main">
               <a:ext uri="{FF2B5EF4-FFF2-40B4-BE49-F238E27FC236}">
-                <a16:creationId xmlns:a16="http://schemas.microsoft.com/office/drawing/2014/main" id="{50425E6F-B4C3-4171-819B-2753B51C8CFD}"/>
+                <a16:creationId xmlns:a16="http://schemas.microsoft.com/office/drawing/2014/main" id="{31964BA0-A968-4F3F-BA07-EE574DCA0991}"/>
               </a:ext>
             </a:extLst>
           </p:cNvPr>
@@ -11085,7 +11285,7 @@
           <p:cNvPr id="4" name="">
             <a:extLst xmlns:a="http://schemas.openxmlformats.org/drawingml/2006/main">
               <a:ext uri="{FF2B5EF4-FFF2-40B4-BE49-F238E27FC236}">
-                <a16:creationId xmlns:a16="http://schemas.microsoft.com/office/drawing/2014/main" id="{FF4FABD6-E189-4944-AA08-864254156AB0}"/>
+                <a16:creationId xmlns:a16="http://schemas.microsoft.com/office/drawing/2014/main" id="{4D91AB71-EEA7-4502-8AA9-972F8263E813}"/>
               </a:ext>
             </a:extLst>
           </p:cNvPr>
@@ -11142,7 +11342,7 @@
           <p:cNvPr id="5" name="">
             <a:extLst xmlns:a="http://schemas.openxmlformats.org/drawingml/2006/main">
               <a:ext uri="{FF2B5EF4-FFF2-40B4-BE49-F238E27FC236}">
-                <a16:creationId xmlns:a16="http://schemas.microsoft.com/office/drawing/2014/main" id="{B0563EA8-4C4E-4DE3-9BA2-936B17C1D163}"/>
+                <a16:creationId xmlns:a16="http://schemas.microsoft.com/office/drawing/2014/main" id="{F2AFC853-DB12-4C3F-8FE2-F5FE223B3A14}"/>
               </a:ext>
             </a:extLst>
           </p:cNvPr>
@@ -11199,7 +11399,7 @@
           <p:cNvPr id="6" name="">
             <a:extLst xmlns:a="http://schemas.openxmlformats.org/drawingml/2006/main">
               <a:ext uri="{FF2B5EF4-FFF2-40B4-BE49-F238E27FC236}">
-                <a16:creationId xmlns:a16="http://schemas.microsoft.com/office/drawing/2014/main" id="{6F8E3EC3-022C-4D0D-928B-4D92C9EC78D3}"/>
+                <a16:creationId xmlns:a16="http://schemas.microsoft.com/office/drawing/2014/main" id="{639BBA4C-EE58-40D0-B656-3E4D09BB5FD9}"/>
               </a:ext>
             </a:extLst>
           </p:cNvPr>
@@ -11256,7 +11456,7 @@
           <p:cNvPr id="7" name="">
             <a:extLst xmlns:a="http://schemas.openxmlformats.org/drawingml/2006/main">
               <a:ext uri="{FF2B5EF4-FFF2-40B4-BE49-F238E27FC236}">
-                <a16:creationId xmlns:a16="http://schemas.microsoft.com/office/drawing/2014/main" id="{C9A3C3DE-4690-4B23-A79F-1E3079713FC6}"/>
+                <a16:creationId xmlns:a16="http://schemas.microsoft.com/office/drawing/2014/main" id="{8C477878-5CCD-44B4-A4B4-52B93054D288}"/>
               </a:ext>
             </a:extLst>
           </p:cNvPr>
@@ -11288,7 +11488,7 @@
           <p:cNvPr id="8" name="">
             <a:extLst xmlns:a="http://schemas.openxmlformats.org/drawingml/2006/main">
               <a:ext uri="{FF2B5EF4-FFF2-40B4-BE49-F238E27FC236}">
-                <a16:creationId xmlns:a16="http://schemas.microsoft.com/office/drawing/2014/main" id="{2CD52B31-2288-409A-8865-6137F98E9C2C}"/>
+                <a16:creationId xmlns:a16="http://schemas.microsoft.com/office/drawing/2014/main" id="{29D30CA0-D3A0-4814-A830-90A2B159C79B}"/>
               </a:ext>
             </a:extLst>
           </p:cNvPr>
@@ -11345,7 +11545,7 @@
           <p:cNvPr id="9" name="">
             <a:extLst xmlns:a="http://schemas.openxmlformats.org/drawingml/2006/main">
               <a:ext uri="{FF2B5EF4-FFF2-40B4-BE49-F238E27FC236}">
-                <a16:creationId xmlns:a16="http://schemas.microsoft.com/office/drawing/2014/main" id="{76BA6716-124A-4ACE-B372-5CBA3933E4B9}"/>
+                <a16:creationId xmlns:a16="http://schemas.microsoft.com/office/drawing/2014/main" id="{BBD19EF5-C798-46C3-9BFF-2FFC54C14F4E}"/>
               </a:ext>
             </a:extLst>
           </p:cNvPr>
@@ -11406,7 +11606,7 @@
           <p:nvPr/>
         </p:nvPicPr>
         <p:blipFill>
-          <a:blip xmlns:r="http://schemas.openxmlformats.org/officeDocument/2006/relationships" xmlns:a="http://schemas.openxmlformats.org/drawingml/2006/main" r:embed="Rde8f17e4b36e42fc"/>
+          <a:blip xmlns:r="http://schemas.openxmlformats.org/officeDocument/2006/relationships" xmlns:a="http://schemas.openxmlformats.org/drawingml/2006/main" r:embed="R1fe4b1a2a23a4e5c"/>
           <a:stretch xmlns:a="http://schemas.openxmlformats.org/drawingml/2006/main"/>
         </p:blipFill>
         <p:spPr>
@@ -11424,7 +11624,7 @@
           <p:cNvPr id="11" name="">
             <a:extLst xmlns:a="http://schemas.openxmlformats.org/drawingml/2006/main">
               <a:ext uri="{FF2B5EF4-FFF2-40B4-BE49-F238E27FC236}">
-                <a16:creationId xmlns:a16="http://schemas.microsoft.com/office/drawing/2014/main" id="{29029D4C-F760-4616-B643-832E2FD5A7B2}"/>
+                <a16:creationId xmlns:a16="http://schemas.microsoft.com/office/drawing/2014/main" id="{B6041AE2-34D6-4980-AF72-B410BF88C5D0}"/>
               </a:ext>
             </a:extLst>
           </p:cNvPr>
@@ -11481,7 +11681,7 @@
           <p:cNvPr id="12" name="">
             <a:extLst xmlns:a="http://schemas.openxmlformats.org/drawingml/2006/main">
               <a:ext uri="{FF2B5EF4-FFF2-40B4-BE49-F238E27FC236}">
-                <a16:creationId xmlns:a16="http://schemas.microsoft.com/office/drawing/2014/main" id="{2B22272A-B4EF-47B7-8DFE-C677C8C472A3}"/>
+                <a16:creationId xmlns:a16="http://schemas.microsoft.com/office/drawing/2014/main" id="{124B5C20-E8E5-4482-A9BC-C9674941B355}"/>
               </a:ext>
             </a:extLst>
           </p:cNvPr>
@@ -11538,7 +11738,7 @@
           <p:cNvPr id="13" name="">
             <a:extLst xmlns:a="http://schemas.openxmlformats.org/drawingml/2006/main">
               <a:ext uri="{FF2B5EF4-FFF2-40B4-BE49-F238E27FC236}">
-                <a16:creationId xmlns:a16="http://schemas.microsoft.com/office/drawing/2014/main" id="{3374EF8B-0456-46A5-B21E-A600B08A3323}"/>
+                <a16:creationId xmlns:a16="http://schemas.microsoft.com/office/drawing/2014/main" id="{88480F84-E6FB-4D65-BAC9-99EB83CFF023}"/>
               </a:ext>
             </a:extLst>
           </p:cNvPr>
@@ -11570,7 +11770,7 @@
           <p:cNvPr id="14" name="">
             <a:extLst xmlns:a="http://schemas.openxmlformats.org/drawingml/2006/main">
               <a:ext uri="{FF2B5EF4-FFF2-40B4-BE49-F238E27FC236}">
-                <a16:creationId xmlns:a16="http://schemas.microsoft.com/office/drawing/2014/main" id="{BB881789-90F1-4076-B95B-955435CC7B04}"/>
+                <a16:creationId xmlns:a16="http://schemas.microsoft.com/office/drawing/2014/main" id="{28353F58-DC36-4B8A-94B5-4695B5E707E8}"/>
               </a:ext>
             </a:extLst>
           </p:cNvPr>
@@ -11627,7 +11827,7 @@
           <p:cNvPr id="15" name="">
             <a:extLst xmlns:a="http://schemas.openxmlformats.org/drawingml/2006/main">
               <a:ext uri="{FF2B5EF4-FFF2-40B4-BE49-F238E27FC236}">
-                <a16:creationId xmlns:a16="http://schemas.microsoft.com/office/drawing/2014/main" id="{A9E9556E-12B7-4AC6-8833-A8D14FF36A89}"/>
+                <a16:creationId xmlns:a16="http://schemas.microsoft.com/office/drawing/2014/main" id="{749265DE-FD0B-420A-A27A-433B97163569}"/>
               </a:ext>
             </a:extLst>
           </p:cNvPr>
@@ -11682,7 +11882,7 @@
     </p:spTree>
     <p:extLst>
       <p:ext uri="{BB962C8B-B14F-4D97-AF65-F5344CB8AC3E}">
-        <p14:creationId xmlns:p14="http://schemas.microsoft.com/office/powerpoint/2010/main" val="1133122302"/>
+        <p14:creationId xmlns:p14="http://schemas.microsoft.com/office/powerpoint/2010/main" val="1194017979"/>
       </p:ext>
     </p:extLst>
   </p:cSld>
@@ -11837,7 +12037,7 @@
           <p:cNvPr id="23" name="">
             <a:extLst xmlns:a="http://schemas.openxmlformats.org/drawingml/2006/main">
               <a:ext uri="{FF2B5EF4-FFF2-40B4-BE49-F238E27FC236}">
-                <a16:creationId xmlns:a16="http://schemas.microsoft.com/office/drawing/2014/main" id="{AE8F7258-4081-4636-927B-D0D26DA46059}"/>
+                <a16:creationId xmlns:a16="http://schemas.microsoft.com/office/drawing/2014/main" id="{ED80F18E-53EB-4F08-B850-24440ECB75F5}"/>
               </a:ext>
             </a:extLst>
           </p:cNvPr>
@@ -11869,7 +12069,7 @@
           <p:cNvPr id="2" name="">
             <a:extLst xmlns:a="http://schemas.openxmlformats.org/drawingml/2006/main">
               <a:ext uri="{FF2B5EF4-FFF2-40B4-BE49-F238E27FC236}">
-                <a16:creationId xmlns:a16="http://schemas.microsoft.com/office/drawing/2014/main" id="{F7969110-1CAF-4B4A-9671-F3057DE86F9D}"/>
+                <a16:creationId xmlns:a16="http://schemas.microsoft.com/office/drawing/2014/main" id="{71CEC8A8-6750-4417-9AB1-007C7649386F}"/>
               </a:ext>
             </a:extLst>
           </p:cNvPr>
@@ -11926,7 +12126,7 @@
           <p:cNvPr id="3" name="">
             <a:extLst xmlns:a="http://schemas.openxmlformats.org/drawingml/2006/main">
               <a:ext uri="{FF2B5EF4-FFF2-40B4-BE49-F238E27FC236}">
-                <a16:creationId xmlns:a16="http://schemas.microsoft.com/office/drawing/2014/main" id="{1BB5D8E1-D7AB-4BC4-A05C-500158170703}"/>
+                <a16:creationId xmlns:a16="http://schemas.microsoft.com/office/drawing/2014/main" id="{E95D56EF-3CB2-4F6F-A493-27DA3FF22A39}"/>
               </a:ext>
             </a:extLst>
           </p:cNvPr>
@@ -11958,7 +12158,7 @@
           <p:cNvPr id="4" name="">
             <a:extLst xmlns:a="http://schemas.openxmlformats.org/drawingml/2006/main">
               <a:ext uri="{FF2B5EF4-FFF2-40B4-BE49-F238E27FC236}">
-                <a16:creationId xmlns:a16="http://schemas.microsoft.com/office/drawing/2014/main" id="{379F1E3E-99B0-46B5-A0E7-886475CA54AE}"/>
+                <a16:creationId xmlns:a16="http://schemas.microsoft.com/office/drawing/2014/main" id="{33D2E088-D2A6-452A-A1D7-D2E0B2F306AB}"/>
               </a:ext>
             </a:extLst>
           </p:cNvPr>
@@ -12015,7 +12215,7 @@
           <p:cNvPr id="5" name="">
             <a:extLst xmlns:a="http://schemas.openxmlformats.org/drawingml/2006/main">
               <a:ext uri="{FF2B5EF4-FFF2-40B4-BE49-F238E27FC236}">
-                <a16:creationId xmlns:a16="http://schemas.microsoft.com/office/drawing/2014/main" id="{87E8FE04-3E8C-4972-BB36-79DB74ADC2D0}"/>
+                <a16:creationId xmlns:a16="http://schemas.microsoft.com/office/drawing/2014/main" id="{D78414E3-CA47-4289-8D08-DD38783C0B14}"/>
               </a:ext>
             </a:extLst>
           </p:cNvPr>
@@ -12072,7 +12272,7 @@
           <p:cNvPr id="6" name="">
             <a:extLst xmlns:a="http://schemas.openxmlformats.org/drawingml/2006/main">
               <a:ext uri="{FF2B5EF4-FFF2-40B4-BE49-F238E27FC236}">
-                <a16:creationId xmlns:a16="http://schemas.microsoft.com/office/drawing/2014/main" id="{96612755-B148-4C90-AD80-F4172733384F}"/>
+                <a16:creationId xmlns:a16="http://schemas.microsoft.com/office/drawing/2014/main" id="{559DCB17-A7CE-40F1-99E9-BAE4CD98B37F}"/>
               </a:ext>
             </a:extLst>
           </p:cNvPr>
@@ -12129,7 +12329,7 @@
           <p:cNvPr id="7" name="">
             <a:extLst xmlns:a="http://schemas.openxmlformats.org/drawingml/2006/main">
               <a:ext uri="{FF2B5EF4-FFF2-40B4-BE49-F238E27FC236}">
-                <a16:creationId xmlns:a16="http://schemas.microsoft.com/office/drawing/2014/main" id="{A7A8E34E-616E-46F5-85A8-DA38239FEFCB}"/>
+                <a16:creationId xmlns:a16="http://schemas.microsoft.com/office/drawing/2014/main" id="{04596885-E2E7-49DE-9D04-B0B7975346CB}"/>
               </a:ext>
             </a:extLst>
           </p:cNvPr>
@@ -12161,7 +12361,7 @@
           <p:cNvPr id="8" name="">
             <a:extLst xmlns:a="http://schemas.openxmlformats.org/drawingml/2006/main">
               <a:ext uri="{FF2B5EF4-FFF2-40B4-BE49-F238E27FC236}">
-                <a16:creationId xmlns:a16="http://schemas.microsoft.com/office/drawing/2014/main" id="{009DD48A-AA37-4F50-8A1E-F2ACDD86AC5A}"/>
+                <a16:creationId xmlns:a16="http://schemas.microsoft.com/office/drawing/2014/main" id="{D709DE60-D534-4F18-ABB5-0338C08FA3A5}"/>
               </a:ext>
             </a:extLst>
           </p:cNvPr>
@@ -12218,7 +12418,7 @@
           <p:cNvPr id="9" name="">
             <a:extLst xmlns:a="http://schemas.openxmlformats.org/drawingml/2006/main">
               <a:ext uri="{FF2B5EF4-FFF2-40B4-BE49-F238E27FC236}">
-                <a16:creationId xmlns:a16="http://schemas.microsoft.com/office/drawing/2014/main" id="{A9E5BD82-3077-407B-BC6E-C165683AF7E2}"/>
+                <a16:creationId xmlns:a16="http://schemas.microsoft.com/office/drawing/2014/main" id="{54DC20C3-0BE9-45E1-BF16-F7E497B85F77}"/>
               </a:ext>
             </a:extLst>
           </p:cNvPr>
@@ -12275,7 +12475,7 @@
           <p:cNvPr id="10" name="">
             <a:extLst xmlns:a="http://schemas.openxmlformats.org/drawingml/2006/main">
               <a:ext uri="{FF2B5EF4-FFF2-40B4-BE49-F238E27FC236}">
-                <a16:creationId xmlns:a16="http://schemas.microsoft.com/office/drawing/2014/main" id="{4C8FC558-1156-4A04-A1A0-2879F51EE2DD}"/>
+                <a16:creationId xmlns:a16="http://schemas.microsoft.com/office/drawing/2014/main" id="{EE2C571B-66ED-41D1-95F7-5CBCB4F2C982}"/>
               </a:ext>
             </a:extLst>
           </p:cNvPr>
@@ -12309,7 +12509,7 @@
           <p:cNvPr id="11" name="">
             <a:extLst xmlns:a="http://schemas.openxmlformats.org/drawingml/2006/main">
               <a:ext uri="{FF2B5EF4-FFF2-40B4-BE49-F238E27FC236}">
-                <a16:creationId xmlns:a16="http://schemas.microsoft.com/office/drawing/2014/main" id="{199156C8-406D-46F1-8E24-DB0840DC0897}"/>
+                <a16:creationId xmlns:a16="http://schemas.microsoft.com/office/drawing/2014/main" id="{035837FF-D129-4A4F-9BEA-113BDDF43050}"/>
               </a:ext>
             </a:extLst>
           </p:cNvPr>
@@ -12341,7 +12541,7 @@
           <p:cNvPr id="12" name="">
             <a:extLst xmlns:a="http://schemas.openxmlformats.org/drawingml/2006/main">
               <a:ext uri="{FF2B5EF4-FFF2-40B4-BE49-F238E27FC236}">
-                <a16:creationId xmlns:a16="http://schemas.microsoft.com/office/drawing/2014/main" id="{EA5689FD-5EE6-484C-B192-CC4B54BC1586}"/>
+                <a16:creationId xmlns:a16="http://schemas.microsoft.com/office/drawing/2014/main" id="{C0F018A0-9633-43CB-8148-14E542B0F8C5}"/>
               </a:ext>
             </a:extLst>
           </p:cNvPr>
@@ -12398,7 +12598,7 @@
           <p:cNvPr id="13" name="">
             <a:extLst xmlns:a="http://schemas.openxmlformats.org/drawingml/2006/main">
               <a:ext uri="{FF2B5EF4-FFF2-40B4-BE49-F238E27FC236}">
-                <a16:creationId xmlns:a16="http://schemas.microsoft.com/office/drawing/2014/main" id="{A9ECC6C1-D409-4453-9750-B1C4EA9EA3D9}"/>
+                <a16:creationId xmlns:a16="http://schemas.microsoft.com/office/drawing/2014/main" id="{55F17A10-2C1D-4942-9CEF-1620EEFAA130}"/>
               </a:ext>
             </a:extLst>
           </p:cNvPr>
@@ -12455,7 +12655,7 @@
           <p:cNvPr id="14" name="">
             <a:extLst xmlns:a="http://schemas.openxmlformats.org/drawingml/2006/main">
               <a:ext uri="{FF2B5EF4-FFF2-40B4-BE49-F238E27FC236}">
-                <a16:creationId xmlns:a16="http://schemas.microsoft.com/office/drawing/2014/main" id="{8F4EE3A4-5751-41AA-9A54-2A58F224A6D8}"/>
+                <a16:creationId xmlns:a16="http://schemas.microsoft.com/office/drawing/2014/main" id="{ACF69BAE-69A1-44DE-AD69-2B113C6DB99E}"/>
               </a:ext>
             </a:extLst>
           </p:cNvPr>
@@ -12489,7 +12689,7 @@
           <p:cNvPr id="15" name="">
             <a:extLst xmlns:a="http://schemas.openxmlformats.org/drawingml/2006/main">
               <a:ext uri="{FF2B5EF4-FFF2-40B4-BE49-F238E27FC236}">
-                <a16:creationId xmlns:a16="http://schemas.microsoft.com/office/drawing/2014/main" id="{DFEE4DF1-6191-4F74-A17D-9FD1B19CB044}"/>
+                <a16:creationId xmlns:a16="http://schemas.microsoft.com/office/drawing/2014/main" id="{FD02A722-56DD-4894-9424-A2CDC1992783}"/>
               </a:ext>
             </a:extLst>
           </p:cNvPr>
@@ -12521,7 +12721,7 @@
           <p:cNvPr id="16" name="">
             <a:extLst xmlns:a="http://schemas.openxmlformats.org/drawingml/2006/main">
               <a:ext uri="{FF2B5EF4-FFF2-40B4-BE49-F238E27FC236}">
-                <a16:creationId xmlns:a16="http://schemas.microsoft.com/office/drawing/2014/main" id="{F0743E95-BC61-4577-81F1-F37E8AAC06AF}"/>
+                <a16:creationId xmlns:a16="http://schemas.microsoft.com/office/drawing/2014/main" id="{BBBD9D54-B11D-4415-9CEF-AD191A5AC106}"/>
               </a:ext>
             </a:extLst>
           </p:cNvPr>
@@ -12578,7 +12778,7 @@
           <p:cNvPr id="17" name="">
             <a:extLst xmlns:a="http://schemas.openxmlformats.org/drawingml/2006/main">
               <a:ext uri="{FF2B5EF4-FFF2-40B4-BE49-F238E27FC236}">
-                <a16:creationId xmlns:a16="http://schemas.microsoft.com/office/drawing/2014/main" id="{4B5FF539-372A-4883-A703-E7DCE0FBBAA3}"/>
+                <a16:creationId xmlns:a16="http://schemas.microsoft.com/office/drawing/2014/main" id="{1C6AA92C-AAEA-47A5-B82E-F993BDF7D856}"/>
               </a:ext>
             </a:extLst>
           </p:cNvPr>
@@ -12635,7 +12835,7 @@
           <p:cNvPr id="18" name="">
             <a:extLst xmlns:a="http://schemas.openxmlformats.org/drawingml/2006/main">
               <a:ext uri="{FF2B5EF4-FFF2-40B4-BE49-F238E27FC236}">
-                <a16:creationId xmlns:a16="http://schemas.microsoft.com/office/drawing/2014/main" id="{13084253-D08F-48D5-B425-35E529011D5B}"/>
+                <a16:creationId xmlns:a16="http://schemas.microsoft.com/office/drawing/2014/main" id="{3DA6E6DE-1231-4366-94BC-6B7B55BDB614}"/>
               </a:ext>
             </a:extLst>
           </p:cNvPr>
@@ -12669,7 +12869,7 @@
           <p:cNvPr id="19" name="">
             <a:extLst xmlns:a="http://schemas.openxmlformats.org/drawingml/2006/main">
               <a:ext uri="{FF2B5EF4-FFF2-40B4-BE49-F238E27FC236}">
-                <a16:creationId xmlns:a16="http://schemas.microsoft.com/office/drawing/2014/main" id="{F2800775-524F-4774-A576-ED357F876995}"/>
+                <a16:creationId xmlns:a16="http://schemas.microsoft.com/office/drawing/2014/main" id="{610D3CD6-9F9D-473B-B5CB-2152D75FF037}"/>
               </a:ext>
             </a:extLst>
           </p:cNvPr>
@@ -12701,7 +12901,7 @@
           <p:cNvPr id="20" name="">
             <a:extLst xmlns:a="http://schemas.openxmlformats.org/drawingml/2006/main">
               <a:ext uri="{FF2B5EF4-FFF2-40B4-BE49-F238E27FC236}">
-                <a16:creationId xmlns:a16="http://schemas.microsoft.com/office/drawing/2014/main" id="{12491982-6C01-4B43-9938-36B7AE2ADFAB}"/>
+                <a16:creationId xmlns:a16="http://schemas.microsoft.com/office/drawing/2014/main" id="{1600109A-552B-4FD3-93F1-8EBCB6AD5DB9}"/>
               </a:ext>
             </a:extLst>
           </p:cNvPr>
@@ -12758,7 +12958,7 @@
           <p:cNvPr id="21" name="">
             <a:extLst xmlns:a="http://schemas.openxmlformats.org/drawingml/2006/main">
               <a:ext uri="{FF2B5EF4-FFF2-40B4-BE49-F238E27FC236}">
-                <a16:creationId xmlns:a16="http://schemas.microsoft.com/office/drawing/2014/main" id="{40FE3E26-8229-4578-AA07-473F9A4F4470}"/>
+                <a16:creationId xmlns:a16="http://schemas.microsoft.com/office/drawing/2014/main" id="{F1EC1355-BE1F-4582-8500-774B903613DB}"/>
               </a:ext>
             </a:extLst>
           </p:cNvPr>
@@ -12815,7 +13015,7 @@
           <p:cNvPr id="22" name="">
             <a:extLst xmlns:a="http://schemas.openxmlformats.org/drawingml/2006/main">
               <a:ext uri="{FF2B5EF4-FFF2-40B4-BE49-F238E27FC236}">
-                <a16:creationId xmlns:a16="http://schemas.microsoft.com/office/drawing/2014/main" id="{FBAE50D2-4A3A-4B6E-8C45-9E99F245DA3E}"/>
+                <a16:creationId xmlns:a16="http://schemas.microsoft.com/office/drawing/2014/main" id="{08A74049-5D98-40A1-9A5A-F721DA922F2E}"/>
               </a:ext>
             </a:extLst>
           </p:cNvPr>
@@ -12870,7 +13070,7 @@
     </p:spTree>
     <p:extLst>
       <p:ext uri="{BB962C8B-B14F-4D97-AF65-F5344CB8AC3E}">
-        <p14:creationId xmlns:p14="http://schemas.microsoft.com/office/powerpoint/2010/main" val="875739128"/>
+        <p14:creationId xmlns:p14="http://schemas.microsoft.com/office/powerpoint/2010/main" val="1585159679"/>
       </p:ext>
     </p:extLst>
   </p:cSld>
@@ -13071,7 +13271,7 @@
           <p:cNvPr id="22" name="">
             <a:extLst xmlns:a="http://schemas.openxmlformats.org/drawingml/2006/main">
               <a:ext uri="{FF2B5EF4-FFF2-40B4-BE49-F238E27FC236}">
-                <a16:creationId xmlns:a16="http://schemas.microsoft.com/office/drawing/2014/main" id="{5FA808B8-CDC7-49F3-B533-A565E41B7958}"/>
+                <a16:creationId xmlns:a16="http://schemas.microsoft.com/office/drawing/2014/main" id="{031EF65B-CA87-447A-BA10-B5304988368B}"/>
               </a:ext>
             </a:extLst>
           </p:cNvPr>
@@ -13103,7 +13303,7 @@
           <p:cNvPr id="2" name="">
             <a:extLst xmlns:a="http://schemas.openxmlformats.org/drawingml/2006/main">
               <a:ext uri="{FF2B5EF4-FFF2-40B4-BE49-F238E27FC236}">
-                <a16:creationId xmlns:a16="http://schemas.microsoft.com/office/drawing/2014/main" id="{C7F03D7E-0CFB-4673-BDE9-F3C4190B04E6}"/>
+                <a16:creationId xmlns:a16="http://schemas.microsoft.com/office/drawing/2014/main" id="{41184214-CC5A-4994-85A3-5577C30B286E}"/>
               </a:ext>
             </a:extLst>
           </p:cNvPr>
@@ -13160,7 +13360,7 @@
           <p:cNvPr id="3" name="">
             <a:extLst xmlns:a="http://schemas.openxmlformats.org/drawingml/2006/main">
               <a:ext uri="{FF2B5EF4-FFF2-40B4-BE49-F238E27FC236}">
-                <a16:creationId xmlns:a16="http://schemas.microsoft.com/office/drawing/2014/main" id="{488BC07D-28A7-409C-9C9F-FD90563841C7}"/>
+                <a16:creationId xmlns:a16="http://schemas.microsoft.com/office/drawing/2014/main" id="{693D9E95-CEAD-43B0-B1BF-E4A4236C2339}"/>
               </a:ext>
             </a:extLst>
           </p:cNvPr>
@@ -13192,7 +13392,7 @@
           <p:cNvPr id="4" name="">
             <a:extLst xmlns:a="http://schemas.openxmlformats.org/drawingml/2006/main">
               <a:ext uri="{FF2B5EF4-FFF2-40B4-BE49-F238E27FC236}">
-                <a16:creationId xmlns:a16="http://schemas.microsoft.com/office/drawing/2014/main" id="{D709C3AB-6403-409B-9C29-E7A7D7B64FBF}"/>
+                <a16:creationId xmlns:a16="http://schemas.microsoft.com/office/drawing/2014/main" id="{D9E7BB58-88C2-44F2-8788-055DC580E04D}"/>
               </a:ext>
             </a:extLst>
           </p:cNvPr>
@@ -13249,7 +13449,7 @@
           <p:cNvPr id="5" name="">
             <a:extLst xmlns:a="http://schemas.openxmlformats.org/drawingml/2006/main">
               <a:ext uri="{FF2B5EF4-FFF2-40B4-BE49-F238E27FC236}">
-                <a16:creationId xmlns:a16="http://schemas.microsoft.com/office/drawing/2014/main" id="{44757336-A843-48E4-8402-8F180B6A7BB1}"/>
+                <a16:creationId xmlns:a16="http://schemas.microsoft.com/office/drawing/2014/main" id="{BC77F957-6B5F-4FAD-8DE6-9E55A7450275}"/>
               </a:ext>
             </a:extLst>
           </p:cNvPr>
@@ -13306,7 +13506,7 @@
           <p:cNvPr id="6" name="">
             <a:extLst xmlns:a="http://schemas.openxmlformats.org/drawingml/2006/main">
               <a:ext uri="{FF2B5EF4-FFF2-40B4-BE49-F238E27FC236}">
-                <a16:creationId xmlns:a16="http://schemas.microsoft.com/office/drawing/2014/main" id="{CD8ECD64-C942-4078-ABBE-E33A3D4C7511}"/>
+                <a16:creationId xmlns:a16="http://schemas.microsoft.com/office/drawing/2014/main" id="{CB9CB77F-8F3D-4F89-ACA7-8B1C32FEB4D7}"/>
               </a:ext>
             </a:extLst>
           </p:cNvPr>
@@ -13363,7 +13563,7 @@
           <p:cNvPr id="7" name="">
             <a:extLst xmlns:a="http://schemas.openxmlformats.org/drawingml/2006/main">
               <a:ext uri="{FF2B5EF4-FFF2-40B4-BE49-F238E27FC236}">
-                <a16:creationId xmlns:a16="http://schemas.microsoft.com/office/drawing/2014/main" id="{9485A659-006E-425D-9536-88DB92CEEBBE}"/>
+                <a16:creationId xmlns:a16="http://schemas.microsoft.com/office/drawing/2014/main" id="{4DB47C2B-E251-4C37-9A5A-501904FA1B0D}"/>
               </a:ext>
             </a:extLst>
           </p:cNvPr>
@@ -13395,7 +13595,7 @@
           <p:cNvPr id="8" name="">
             <a:extLst xmlns:a="http://schemas.openxmlformats.org/drawingml/2006/main">
               <a:ext uri="{FF2B5EF4-FFF2-40B4-BE49-F238E27FC236}">
-                <a16:creationId xmlns:a16="http://schemas.microsoft.com/office/drawing/2014/main" id="{2F98193A-A7EB-4063-8FCC-E9B9EECDF7C0}"/>
+                <a16:creationId xmlns:a16="http://schemas.microsoft.com/office/drawing/2014/main" id="{C3E37BD3-8011-4E59-ADD8-AE22E7838381}"/>
               </a:ext>
             </a:extLst>
           </p:cNvPr>
@@ -13452,7 +13652,7 @@
           <p:cNvPr id="9" name="">
             <a:extLst xmlns:a="http://schemas.openxmlformats.org/drawingml/2006/main">
               <a:ext uri="{FF2B5EF4-FFF2-40B4-BE49-F238E27FC236}">
-                <a16:creationId xmlns:a16="http://schemas.microsoft.com/office/drawing/2014/main" id="{A96A6DEB-94DE-4BB3-8534-722DA344323B}"/>
+                <a16:creationId xmlns:a16="http://schemas.microsoft.com/office/drawing/2014/main" id="{7FF71FEF-BA55-4884-9230-D187C81AE861}"/>
               </a:ext>
             </a:extLst>
           </p:cNvPr>
@@ -13509,7 +13709,7 @@
           <p:cNvPr id="10" name="">
             <a:extLst xmlns:a="http://schemas.openxmlformats.org/drawingml/2006/main">
               <a:ext uri="{FF2B5EF4-FFF2-40B4-BE49-F238E27FC236}">
-                <a16:creationId xmlns:a16="http://schemas.microsoft.com/office/drawing/2014/main" id="{AB169F99-CD9B-4A28-9CBB-C870330241A1}"/>
+                <a16:creationId xmlns:a16="http://schemas.microsoft.com/office/drawing/2014/main" id="{1277D7F5-73E6-45D9-8A4F-3BA271D466E0}"/>
               </a:ext>
             </a:extLst>
           </p:cNvPr>
@@ -13543,7 +13743,7 @@
           <p:cNvPr id="11" name="">
             <a:extLst xmlns:a="http://schemas.openxmlformats.org/drawingml/2006/main">
               <a:ext uri="{FF2B5EF4-FFF2-40B4-BE49-F238E27FC236}">
-                <a16:creationId xmlns:a16="http://schemas.microsoft.com/office/drawing/2014/main" id="{A017FEAC-0327-42E8-932B-5E16BD4EC2CE}"/>
+                <a16:creationId xmlns:a16="http://schemas.microsoft.com/office/drawing/2014/main" id="{FF252D79-23E4-42AC-88D9-4C1B936646A8}"/>
               </a:ext>
             </a:extLst>
           </p:cNvPr>
@@ -13575,7 +13775,7 @@
           <p:cNvPr id="12" name="">
             <a:extLst xmlns:a="http://schemas.openxmlformats.org/drawingml/2006/main">
               <a:ext uri="{FF2B5EF4-FFF2-40B4-BE49-F238E27FC236}">
-                <a16:creationId xmlns:a16="http://schemas.microsoft.com/office/drawing/2014/main" id="{07A784E9-2024-49CE-A5A2-FAB893ACFE97}"/>
+                <a16:creationId xmlns:a16="http://schemas.microsoft.com/office/drawing/2014/main" id="{63C59BCF-451F-4C87-A3C7-0992B67580EF}"/>
               </a:ext>
             </a:extLst>
           </p:cNvPr>
@@ -13632,7 +13832,7 @@
           <p:cNvPr id="13" name="">
             <a:extLst xmlns:a="http://schemas.openxmlformats.org/drawingml/2006/main">
               <a:ext uri="{FF2B5EF4-FFF2-40B4-BE49-F238E27FC236}">
-                <a16:creationId xmlns:a16="http://schemas.microsoft.com/office/drawing/2014/main" id="{96EC7ADB-35D3-4C2A-9B97-7ACC9B79C340}"/>
+                <a16:creationId xmlns:a16="http://schemas.microsoft.com/office/drawing/2014/main" id="{49CDBD2B-45E9-44FB-8DD1-FF408DE50847}"/>
               </a:ext>
             </a:extLst>
           </p:cNvPr>
@@ -13689,7 +13889,7 @@
           <p:cNvPr id="14" name="">
             <a:extLst xmlns:a="http://schemas.openxmlformats.org/drawingml/2006/main">
               <a:ext uri="{FF2B5EF4-FFF2-40B4-BE49-F238E27FC236}">
-                <a16:creationId xmlns:a16="http://schemas.microsoft.com/office/drawing/2014/main" id="{39F7FBE9-071C-4A8E-95BD-315B02640D46}"/>
+                <a16:creationId xmlns:a16="http://schemas.microsoft.com/office/drawing/2014/main" id="{B03647C2-9921-4C5C-A1AD-9C00B8187FAF}"/>
               </a:ext>
             </a:extLst>
           </p:cNvPr>
@@ -13723,7 +13923,7 @@
           <p:cNvPr id="15" name="">
             <a:extLst xmlns:a="http://schemas.openxmlformats.org/drawingml/2006/main">
               <a:ext uri="{FF2B5EF4-FFF2-40B4-BE49-F238E27FC236}">
-                <a16:creationId xmlns:a16="http://schemas.microsoft.com/office/drawing/2014/main" id="{6267D39B-11B9-4050-8CA2-CD2C02833DC9}"/>
+                <a16:creationId xmlns:a16="http://schemas.microsoft.com/office/drawing/2014/main" id="{4D8B88E0-BF33-4A8C-9C33-5FA64B5E98B7}"/>
               </a:ext>
             </a:extLst>
           </p:cNvPr>
@@ -13755,7 +13955,7 @@
           <p:cNvPr id="16" name="">
             <a:extLst xmlns:a="http://schemas.openxmlformats.org/drawingml/2006/main">
               <a:ext uri="{FF2B5EF4-FFF2-40B4-BE49-F238E27FC236}">
-                <a16:creationId xmlns:a16="http://schemas.microsoft.com/office/drawing/2014/main" id="{549CE037-8699-4AC6-AF71-3D0B476700F5}"/>
+                <a16:creationId xmlns:a16="http://schemas.microsoft.com/office/drawing/2014/main" id="{E97E0595-49EA-4542-B43D-B19198D413E0}"/>
               </a:ext>
             </a:extLst>
           </p:cNvPr>
@@ -13812,7 +14012,7 @@
           <p:cNvPr id="17" name="">
             <a:extLst xmlns:a="http://schemas.openxmlformats.org/drawingml/2006/main">
               <a:ext uri="{FF2B5EF4-FFF2-40B4-BE49-F238E27FC236}">
-                <a16:creationId xmlns:a16="http://schemas.microsoft.com/office/drawing/2014/main" id="{21BE0153-6CD7-459C-8F72-58710580F07E}"/>
+                <a16:creationId xmlns:a16="http://schemas.microsoft.com/office/drawing/2014/main" id="{BE7AD0A6-C45D-46E6-9565-7706D0138D0D}"/>
               </a:ext>
             </a:extLst>
           </p:cNvPr>
@@ -13869,7 +14069,7 @@
           <p:cNvPr id="18" name="">
             <a:extLst xmlns:a="http://schemas.openxmlformats.org/drawingml/2006/main">
               <a:ext uri="{FF2B5EF4-FFF2-40B4-BE49-F238E27FC236}">
-                <a16:creationId xmlns:a16="http://schemas.microsoft.com/office/drawing/2014/main" id="{B3252CA3-DAAD-44F2-8695-B302E1F835BD}"/>
+                <a16:creationId xmlns:a16="http://schemas.microsoft.com/office/drawing/2014/main" id="{6780D68F-5D7B-48C9-A3F8-7A153D367C81}"/>
               </a:ext>
             </a:extLst>
           </p:cNvPr>
@@ -13903,7 +14103,7 @@
           <p:cNvPr id="19" name="">
             <a:extLst xmlns:a="http://schemas.openxmlformats.org/drawingml/2006/main">
               <a:ext uri="{FF2B5EF4-FFF2-40B4-BE49-F238E27FC236}">
-                <a16:creationId xmlns:a16="http://schemas.microsoft.com/office/drawing/2014/main" id="{D36FDA30-C720-4E68-8BED-AD084389F095}"/>
+                <a16:creationId xmlns:a16="http://schemas.microsoft.com/office/drawing/2014/main" id="{76CA98DC-BBB9-4686-80D4-D96E7DB5F970}"/>
               </a:ext>
             </a:extLst>
           </p:cNvPr>
@@ -13935,7 +14135,7 @@
           <p:cNvPr id="20" name="">
             <a:extLst xmlns:a="http://schemas.openxmlformats.org/drawingml/2006/main">
               <a:ext uri="{FF2B5EF4-FFF2-40B4-BE49-F238E27FC236}">
-                <a16:creationId xmlns:a16="http://schemas.microsoft.com/office/drawing/2014/main" id="{C3926470-F567-45B4-884F-BECA71A6538C}"/>
+                <a16:creationId xmlns:a16="http://schemas.microsoft.com/office/drawing/2014/main" id="{4B934C70-7C65-4020-BD36-0FFD79FDC83D}"/>
               </a:ext>
             </a:extLst>
           </p:cNvPr>
@@ -13992,7 +14192,7 @@
           <p:cNvPr id="21" name="">
             <a:extLst xmlns:a="http://schemas.openxmlformats.org/drawingml/2006/main">
               <a:ext uri="{FF2B5EF4-FFF2-40B4-BE49-F238E27FC236}">
-                <a16:creationId xmlns:a16="http://schemas.microsoft.com/office/drawing/2014/main" id="{135DE4D7-30F9-4578-BA62-466B0F1345C0}"/>
+                <a16:creationId xmlns:a16="http://schemas.microsoft.com/office/drawing/2014/main" id="{C3663BDB-0D21-4F22-AD40-F246F2B83BD9}"/>
               </a:ext>
             </a:extLst>
           </p:cNvPr>
@@ -14047,7 +14247,7 @@
     </p:spTree>
     <p:extLst>
       <p:ext uri="{BB962C8B-B14F-4D97-AF65-F5344CB8AC3E}">
-        <p14:creationId xmlns:p14="http://schemas.microsoft.com/office/powerpoint/2010/main" val="1658635818"/>
+        <p14:creationId xmlns:p14="http://schemas.microsoft.com/office/powerpoint/2010/main" val="1915083990"/>
       </p:ext>
     </p:extLst>
   </p:cSld>
